--- a/presentation/CS419_Presentation.pptx
+++ b/presentation/CS419_Presentation.pptx
@@ -5,15 +5,15 @@
     <p:sldMasterId id="2147483648" r:id="rId1"/>
   </p:sldMasterIdLst>
   <p:sldIdLst>
-    <p:sldId id="256" r:id="rId7"/>
-    <p:sldId id="257" r:id="rId8"/>
-    <p:sldId id="258" r:id="rId9"/>
-    <p:sldId id="259" r:id="rId10"/>
-    <p:sldId id="260" r:id="rId11"/>
-    <p:sldId id="261" r:id="rId12"/>
-    <p:sldId id="262" r:id="rId13"/>
+    <p:sldId id="256" r:id="rId2"/>
+    <p:sldId id="257" r:id="rId3"/>
+    <p:sldId id="258" r:id="rId4"/>
+    <p:sldId id="259" r:id="rId5"/>
+    <p:sldId id="260" r:id="rId6"/>
+    <p:sldId id="261" r:id="rId7"/>
+    <p:sldId id="262" r:id="rId8"/>
   </p:sldIdLst>
-  <p:sldSz cx="12188952" cy="6858000" type="screen4x3"/>
+  <p:sldSz cx="12188825" cy="6858000"/>
   <p:notesSz cx="6858000" cy="9144000"/>
   <p:defaultTextStyle>
     <a:defPPr>
@@ -110,6 +110,22 @@
       </a:defRPr>
     </a:lvl9pPr>
   </p:defaultTextStyle>
+  <p:extLst>
+    <p:ext uri="{EFAFB233-063F-42B5-8137-9DF3F51BA10A}">
+      <p15:sldGuideLst xmlns:p15="http://schemas.microsoft.com/office/powerpoint/2012/main">
+        <p15:guide id="1" orient="horz" pos="2160">
+          <p15:clr>
+            <a:srgbClr val="A4A3A4"/>
+          </p15:clr>
+        </p15:guide>
+        <p15:guide id="2" pos="2880">
+          <p15:clr>
+            <a:srgbClr val="A4A3A4"/>
+          </p15:clr>
+        </p15:guide>
+      </p15:sldGuideLst>
+    </p:ext>
+  </p:extLst>
 </p:presentation>
 </file>
 
@@ -151,10 +167,9 @@
           <a:lstStyle/>
           <a:p>
             <a:r>
-              <a:rPr lang="en-US" smtClean="0"/>
+              <a:rPr lang="en-US"/>
               <a:t>Click to edit Master title style</a:t>
             </a:r>
-            <a:endParaRPr lang="en-US"/>
           </a:p>
         </p:txBody>
       </p:sp>
@@ -270,10 +285,9 @@
           </a:lstStyle>
           <a:p>
             <a:r>
-              <a:rPr lang="en-US" smtClean="0"/>
+              <a:rPr lang="en-US"/>
               <a:t>Click to edit Master subtitle style</a:t>
             </a:r>
-            <a:endParaRPr lang="en-US"/>
           </a:p>
         </p:txBody>
       </p:sp>
@@ -294,7 +308,7 @@
           <a:p>
             <a:fld id="{5BCAD085-E8A6-8845-BD4E-CB4CCA059FC4}" type="datetimeFigureOut">
               <a:rPr lang="en-US" smtClean="0"/>
-              <a:t>1/27/13</a:t>
+              <a:t>4/19/2026</a:t>
             </a:fld>
             <a:endParaRPr lang="en-US"/>
           </a:p>
@@ -388,10 +402,9 @@
           <a:lstStyle/>
           <a:p>
             <a:r>
-              <a:rPr lang="en-US" smtClean="0"/>
+              <a:rPr lang="en-US"/>
               <a:t>Click to edit Master title style</a:t>
             </a:r>
-            <a:endParaRPr lang="en-US"/>
           </a:p>
         </p:txBody>
       </p:sp>
@@ -412,38 +425,37 @@
           <a:p>
             <a:pPr lvl="0"/>
             <a:r>
-              <a:rPr lang="en-US" smtClean="0"/>
+              <a:rPr lang="en-US"/>
               <a:t>Click to edit Master text styles</a:t>
             </a:r>
           </a:p>
           <a:p>
             <a:pPr lvl="1"/>
             <a:r>
-              <a:rPr lang="en-US" smtClean="0"/>
+              <a:rPr lang="en-US"/>
               <a:t>Second level</a:t>
             </a:r>
           </a:p>
           <a:p>
             <a:pPr lvl="2"/>
             <a:r>
-              <a:rPr lang="en-US" smtClean="0"/>
+              <a:rPr lang="en-US"/>
               <a:t>Third level</a:t>
             </a:r>
           </a:p>
           <a:p>
             <a:pPr lvl="3"/>
             <a:r>
-              <a:rPr lang="en-US" smtClean="0"/>
+              <a:rPr lang="en-US"/>
               <a:t>Fourth level</a:t>
             </a:r>
           </a:p>
           <a:p>
             <a:pPr lvl="4"/>
             <a:r>
-              <a:rPr lang="en-US" smtClean="0"/>
+              <a:rPr lang="en-US"/>
               <a:t>Fifth level</a:t>
             </a:r>
-            <a:endParaRPr lang="en-US"/>
           </a:p>
         </p:txBody>
       </p:sp>
@@ -464,7 +476,7 @@
           <a:p>
             <a:fld id="{5BCAD085-E8A6-8845-BD4E-CB4CCA059FC4}" type="datetimeFigureOut">
               <a:rPr lang="en-US" smtClean="0"/>
-              <a:t>1/27/13</a:t>
+              <a:t>4/19/2026</a:t>
             </a:fld>
             <a:endParaRPr lang="en-US"/>
           </a:p>
@@ -563,10 +575,9 @@
           <a:lstStyle/>
           <a:p>
             <a:r>
-              <a:rPr lang="en-US" smtClean="0"/>
+              <a:rPr lang="en-US"/>
               <a:t>Click to edit Master title style</a:t>
             </a:r>
-            <a:endParaRPr lang="en-US"/>
           </a:p>
         </p:txBody>
       </p:sp>
@@ -592,38 +603,37 @@
           <a:p>
             <a:pPr lvl="0"/>
             <a:r>
-              <a:rPr lang="en-US" smtClean="0"/>
+              <a:rPr lang="en-US"/>
               <a:t>Click to edit Master text styles</a:t>
             </a:r>
           </a:p>
           <a:p>
             <a:pPr lvl="1"/>
             <a:r>
-              <a:rPr lang="en-US" smtClean="0"/>
+              <a:rPr lang="en-US"/>
               <a:t>Second level</a:t>
             </a:r>
           </a:p>
           <a:p>
             <a:pPr lvl="2"/>
             <a:r>
-              <a:rPr lang="en-US" smtClean="0"/>
+              <a:rPr lang="en-US"/>
               <a:t>Third level</a:t>
             </a:r>
           </a:p>
           <a:p>
             <a:pPr lvl="3"/>
             <a:r>
-              <a:rPr lang="en-US" smtClean="0"/>
+              <a:rPr lang="en-US"/>
               <a:t>Fourth level</a:t>
             </a:r>
           </a:p>
           <a:p>
             <a:pPr lvl="4"/>
             <a:r>
-              <a:rPr lang="en-US" smtClean="0"/>
+              <a:rPr lang="en-US"/>
               <a:t>Fifth level</a:t>
             </a:r>
-            <a:endParaRPr lang="en-US"/>
           </a:p>
         </p:txBody>
       </p:sp>
@@ -644,7 +654,7 @@
           <a:p>
             <a:fld id="{5BCAD085-E8A6-8845-BD4E-CB4CCA059FC4}" type="datetimeFigureOut">
               <a:rPr lang="en-US" smtClean="0"/>
-              <a:t>1/27/13</a:t>
+              <a:t>4/19/2026</a:t>
             </a:fld>
             <a:endParaRPr lang="en-US"/>
           </a:p>
@@ -738,10 +748,9 @@
           <a:lstStyle/>
           <a:p>
             <a:r>
-              <a:rPr lang="en-US" smtClean="0"/>
+              <a:rPr lang="en-US"/>
               <a:t>Click to edit Master title style</a:t>
             </a:r>
-            <a:endParaRPr lang="en-US"/>
           </a:p>
         </p:txBody>
       </p:sp>
@@ -762,38 +771,37 @@
           <a:p>
             <a:pPr lvl="0"/>
             <a:r>
-              <a:rPr lang="en-US" smtClean="0"/>
+              <a:rPr lang="en-US"/>
               <a:t>Click to edit Master text styles</a:t>
             </a:r>
           </a:p>
           <a:p>
             <a:pPr lvl="1"/>
             <a:r>
-              <a:rPr lang="en-US" smtClean="0"/>
+              <a:rPr lang="en-US"/>
               <a:t>Second level</a:t>
             </a:r>
           </a:p>
           <a:p>
             <a:pPr lvl="2"/>
             <a:r>
-              <a:rPr lang="en-US" smtClean="0"/>
+              <a:rPr lang="en-US"/>
               <a:t>Third level</a:t>
             </a:r>
           </a:p>
           <a:p>
             <a:pPr lvl="3"/>
             <a:r>
-              <a:rPr lang="en-US" smtClean="0"/>
+              <a:rPr lang="en-US"/>
               <a:t>Fourth level</a:t>
             </a:r>
           </a:p>
           <a:p>
             <a:pPr lvl="4"/>
             <a:r>
-              <a:rPr lang="en-US" smtClean="0"/>
+              <a:rPr lang="en-US"/>
               <a:t>Fifth level</a:t>
             </a:r>
-            <a:endParaRPr lang="en-US"/>
           </a:p>
         </p:txBody>
       </p:sp>
@@ -814,7 +822,7 @@
           <a:p>
             <a:fld id="{5BCAD085-E8A6-8845-BD4E-CB4CCA059FC4}" type="datetimeFigureOut">
               <a:rPr lang="en-US" smtClean="0"/>
-              <a:t>1/27/13</a:t>
+              <a:t>4/19/2026</a:t>
             </a:fld>
             <a:endParaRPr lang="en-US"/>
           </a:p>
@@ -917,10 +925,9 @@
           </a:lstStyle>
           <a:p>
             <a:r>
-              <a:rPr lang="en-US" smtClean="0"/>
+              <a:rPr lang="en-US"/>
               <a:t>Click to edit Master title style</a:t>
             </a:r>
-            <a:endParaRPr lang="en-US"/>
           </a:p>
         </p:txBody>
       </p:sp>
@@ -1037,7 +1044,7 @@
           <a:p>
             <a:pPr lvl="0"/>
             <a:r>
-              <a:rPr lang="en-US" smtClean="0"/>
+              <a:rPr lang="en-US"/>
               <a:t>Click to edit Master text styles</a:t>
             </a:r>
           </a:p>
@@ -1060,7 +1067,7 @@
           <a:p>
             <a:fld id="{5BCAD085-E8A6-8845-BD4E-CB4CCA059FC4}" type="datetimeFigureOut">
               <a:rPr lang="en-US" smtClean="0"/>
-              <a:t>1/27/13</a:t>
+              <a:t>4/19/2026</a:t>
             </a:fld>
             <a:endParaRPr lang="en-US"/>
           </a:p>
@@ -1154,10 +1161,9 @@
           <a:lstStyle/>
           <a:p>
             <a:r>
-              <a:rPr lang="en-US" smtClean="0"/>
+              <a:rPr lang="en-US"/>
               <a:t>Click to edit Master title style</a:t>
             </a:r>
-            <a:endParaRPr lang="en-US"/>
           </a:p>
         </p:txBody>
       </p:sp>
@@ -1211,38 +1217,37 @@
           <a:p>
             <a:pPr lvl="0"/>
             <a:r>
-              <a:rPr lang="en-US" smtClean="0"/>
+              <a:rPr lang="en-US"/>
               <a:t>Click to edit Master text styles</a:t>
             </a:r>
           </a:p>
           <a:p>
             <a:pPr lvl="1"/>
             <a:r>
-              <a:rPr lang="en-US" smtClean="0"/>
+              <a:rPr lang="en-US"/>
               <a:t>Second level</a:t>
             </a:r>
           </a:p>
           <a:p>
             <a:pPr lvl="2"/>
             <a:r>
-              <a:rPr lang="en-US" smtClean="0"/>
+              <a:rPr lang="en-US"/>
               <a:t>Third level</a:t>
             </a:r>
           </a:p>
           <a:p>
             <a:pPr lvl="3"/>
             <a:r>
-              <a:rPr lang="en-US" smtClean="0"/>
+              <a:rPr lang="en-US"/>
               <a:t>Fourth level</a:t>
             </a:r>
           </a:p>
           <a:p>
             <a:pPr lvl="4"/>
             <a:r>
-              <a:rPr lang="en-US" smtClean="0"/>
+              <a:rPr lang="en-US"/>
               <a:t>Fifth level</a:t>
             </a:r>
-            <a:endParaRPr lang="en-US"/>
           </a:p>
         </p:txBody>
       </p:sp>
@@ -1296,38 +1301,37 @@
           <a:p>
             <a:pPr lvl="0"/>
             <a:r>
-              <a:rPr lang="en-US" smtClean="0"/>
+              <a:rPr lang="en-US"/>
               <a:t>Click to edit Master text styles</a:t>
             </a:r>
           </a:p>
           <a:p>
             <a:pPr lvl="1"/>
             <a:r>
-              <a:rPr lang="en-US" smtClean="0"/>
+              <a:rPr lang="en-US"/>
               <a:t>Second level</a:t>
             </a:r>
           </a:p>
           <a:p>
             <a:pPr lvl="2"/>
             <a:r>
-              <a:rPr lang="en-US" smtClean="0"/>
+              <a:rPr lang="en-US"/>
               <a:t>Third level</a:t>
             </a:r>
           </a:p>
           <a:p>
             <a:pPr lvl="3"/>
             <a:r>
-              <a:rPr lang="en-US" smtClean="0"/>
+              <a:rPr lang="en-US"/>
               <a:t>Fourth level</a:t>
             </a:r>
           </a:p>
           <a:p>
             <a:pPr lvl="4"/>
             <a:r>
-              <a:rPr lang="en-US" smtClean="0"/>
+              <a:rPr lang="en-US"/>
               <a:t>Fifth level</a:t>
             </a:r>
-            <a:endParaRPr lang="en-US"/>
           </a:p>
         </p:txBody>
       </p:sp>
@@ -1348,7 +1352,7 @@
           <a:p>
             <a:fld id="{5BCAD085-E8A6-8845-BD4E-CB4CCA059FC4}" type="datetimeFigureOut">
               <a:rPr lang="en-US" smtClean="0"/>
-              <a:t>1/27/13</a:t>
+              <a:t>4/19/2026</a:t>
             </a:fld>
             <a:endParaRPr lang="en-US"/>
           </a:p>
@@ -1446,10 +1450,9 @@
           </a:lstStyle>
           <a:p>
             <a:r>
-              <a:rPr lang="en-US" smtClean="0"/>
+              <a:rPr lang="en-US"/>
               <a:t>Click to edit Master title style</a:t>
             </a:r>
-            <a:endParaRPr lang="en-US"/>
           </a:p>
         </p:txBody>
       </p:sp>
@@ -1512,7 +1515,7 @@
           <a:p>
             <a:pPr lvl="0"/>
             <a:r>
-              <a:rPr lang="en-US" smtClean="0"/>
+              <a:rPr lang="en-US"/>
               <a:t>Click to edit Master text styles</a:t>
             </a:r>
           </a:p>
@@ -1568,38 +1571,37 @@
           <a:p>
             <a:pPr lvl="0"/>
             <a:r>
-              <a:rPr lang="en-US" smtClean="0"/>
+              <a:rPr lang="en-US"/>
               <a:t>Click to edit Master text styles</a:t>
             </a:r>
           </a:p>
           <a:p>
             <a:pPr lvl="1"/>
             <a:r>
-              <a:rPr lang="en-US" smtClean="0"/>
+              <a:rPr lang="en-US"/>
               <a:t>Second level</a:t>
             </a:r>
           </a:p>
           <a:p>
             <a:pPr lvl="2"/>
             <a:r>
-              <a:rPr lang="en-US" smtClean="0"/>
+              <a:rPr lang="en-US"/>
               <a:t>Third level</a:t>
             </a:r>
           </a:p>
           <a:p>
             <a:pPr lvl="3"/>
             <a:r>
-              <a:rPr lang="en-US" smtClean="0"/>
+              <a:rPr lang="en-US"/>
               <a:t>Fourth level</a:t>
             </a:r>
           </a:p>
           <a:p>
             <a:pPr lvl="4"/>
             <a:r>
-              <a:rPr lang="en-US" smtClean="0"/>
+              <a:rPr lang="en-US"/>
               <a:t>Fifth level</a:t>
             </a:r>
-            <a:endParaRPr lang="en-US"/>
           </a:p>
         </p:txBody>
       </p:sp>
@@ -1662,7 +1664,7 @@
           <a:p>
             <a:pPr lvl="0"/>
             <a:r>
-              <a:rPr lang="en-US" smtClean="0"/>
+              <a:rPr lang="en-US"/>
               <a:t>Click to edit Master text styles</a:t>
             </a:r>
           </a:p>
@@ -1718,38 +1720,37 @@
           <a:p>
             <a:pPr lvl="0"/>
             <a:r>
-              <a:rPr lang="en-US" smtClean="0"/>
+              <a:rPr lang="en-US"/>
               <a:t>Click to edit Master text styles</a:t>
             </a:r>
           </a:p>
           <a:p>
             <a:pPr lvl="1"/>
             <a:r>
-              <a:rPr lang="en-US" smtClean="0"/>
+              <a:rPr lang="en-US"/>
               <a:t>Second level</a:t>
             </a:r>
           </a:p>
           <a:p>
             <a:pPr lvl="2"/>
             <a:r>
-              <a:rPr lang="en-US" smtClean="0"/>
+              <a:rPr lang="en-US"/>
               <a:t>Third level</a:t>
             </a:r>
           </a:p>
           <a:p>
             <a:pPr lvl="3"/>
             <a:r>
-              <a:rPr lang="en-US" smtClean="0"/>
+              <a:rPr lang="en-US"/>
               <a:t>Fourth level</a:t>
             </a:r>
           </a:p>
           <a:p>
             <a:pPr lvl="4"/>
             <a:r>
-              <a:rPr lang="en-US" smtClean="0"/>
+              <a:rPr lang="en-US"/>
               <a:t>Fifth level</a:t>
             </a:r>
-            <a:endParaRPr lang="en-US"/>
           </a:p>
         </p:txBody>
       </p:sp>
@@ -1770,7 +1771,7 @@
           <a:p>
             <a:fld id="{5BCAD085-E8A6-8845-BD4E-CB4CCA059FC4}" type="datetimeFigureOut">
               <a:rPr lang="en-US" smtClean="0"/>
-              <a:t>1/27/13</a:t>
+              <a:t>4/19/2026</a:t>
             </a:fld>
             <a:endParaRPr lang="en-US"/>
           </a:p>
@@ -1864,10 +1865,9 @@
           <a:lstStyle/>
           <a:p>
             <a:r>
-              <a:rPr lang="en-US" smtClean="0"/>
+              <a:rPr lang="en-US"/>
               <a:t>Click to edit Master title style</a:t>
             </a:r>
-            <a:endParaRPr lang="en-US"/>
           </a:p>
         </p:txBody>
       </p:sp>
@@ -1888,7 +1888,7 @@
           <a:p>
             <a:fld id="{5BCAD085-E8A6-8845-BD4E-CB4CCA059FC4}" type="datetimeFigureOut">
               <a:rPr lang="en-US" smtClean="0"/>
-              <a:t>1/27/13</a:t>
+              <a:t>4/19/2026</a:t>
             </a:fld>
             <a:endParaRPr lang="en-US"/>
           </a:p>
@@ -1983,7 +1983,7 @@
           <a:p>
             <a:fld id="{5BCAD085-E8A6-8845-BD4E-CB4CCA059FC4}" type="datetimeFigureOut">
               <a:rPr lang="en-US" smtClean="0"/>
-              <a:t>1/27/13</a:t>
+              <a:t>4/19/2026</a:t>
             </a:fld>
             <a:endParaRPr lang="en-US"/>
           </a:p>
@@ -2086,10 +2086,9 @@
           </a:lstStyle>
           <a:p>
             <a:r>
-              <a:rPr lang="en-US" smtClean="0"/>
+              <a:rPr lang="en-US"/>
               <a:t>Click to edit Master title style</a:t>
             </a:r>
-            <a:endParaRPr lang="en-US"/>
           </a:p>
         </p:txBody>
       </p:sp>
@@ -2143,38 +2142,37 @@
           <a:p>
             <a:pPr lvl="0"/>
             <a:r>
-              <a:rPr lang="en-US" smtClean="0"/>
+              <a:rPr lang="en-US"/>
               <a:t>Click to edit Master text styles</a:t>
             </a:r>
           </a:p>
           <a:p>
             <a:pPr lvl="1"/>
             <a:r>
-              <a:rPr lang="en-US" smtClean="0"/>
+              <a:rPr lang="en-US"/>
               <a:t>Second level</a:t>
             </a:r>
           </a:p>
           <a:p>
             <a:pPr lvl="2"/>
             <a:r>
-              <a:rPr lang="en-US" smtClean="0"/>
+              <a:rPr lang="en-US"/>
               <a:t>Third level</a:t>
             </a:r>
           </a:p>
           <a:p>
             <a:pPr lvl="3"/>
             <a:r>
-              <a:rPr lang="en-US" smtClean="0"/>
+              <a:rPr lang="en-US"/>
               <a:t>Fourth level</a:t>
             </a:r>
           </a:p>
           <a:p>
             <a:pPr lvl="4"/>
             <a:r>
-              <a:rPr lang="en-US" smtClean="0"/>
+              <a:rPr lang="en-US"/>
               <a:t>Fifth level</a:t>
             </a:r>
-            <a:endParaRPr lang="en-US"/>
           </a:p>
         </p:txBody>
       </p:sp>
@@ -2237,7 +2235,7 @@
           <a:p>
             <a:pPr lvl="0"/>
             <a:r>
-              <a:rPr lang="en-US" smtClean="0"/>
+              <a:rPr lang="en-US"/>
               <a:t>Click to edit Master text styles</a:t>
             </a:r>
           </a:p>
@@ -2260,7 +2258,7 @@
           <a:p>
             <a:fld id="{5BCAD085-E8A6-8845-BD4E-CB4CCA059FC4}" type="datetimeFigureOut">
               <a:rPr lang="en-US" smtClean="0"/>
-              <a:t>1/27/13</a:t>
+              <a:t>4/19/2026</a:t>
             </a:fld>
             <a:endParaRPr lang="en-US"/>
           </a:p>
@@ -2363,10 +2361,9 @@
           </a:lstStyle>
           <a:p>
             <a:r>
-              <a:rPr lang="en-US" smtClean="0"/>
+              <a:rPr lang="en-US"/>
               <a:t>Click to edit Master title style</a:t>
             </a:r>
-            <a:endParaRPr lang="en-US"/>
           </a:p>
         </p:txBody>
       </p:sp>
@@ -2490,7 +2487,7 @@
           <a:p>
             <a:pPr lvl="0"/>
             <a:r>
-              <a:rPr lang="en-US" smtClean="0"/>
+              <a:rPr lang="en-US"/>
               <a:t>Click to edit Master text styles</a:t>
             </a:r>
           </a:p>
@@ -2513,7 +2510,7 @@
           <a:p>
             <a:fld id="{5BCAD085-E8A6-8845-BD4E-CB4CCA059FC4}" type="datetimeFigureOut">
               <a:rPr lang="en-US" smtClean="0"/>
-              <a:t>1/27/13</a:t>
+              <a:t>4/19/2026</a:t>
             </a:fld>
             <a:endParaRPr lang="en-US"/>
           </a:p>
@@ -2622,10 +2619,9 @@
           <a:lstStyle/>
           <a:p>
             <a:r>
-              <a:rPr lang="en-US" smtClean="0"/>
+              <a:rPr lang="en-US"/>
               <a:t>Click to edit Master title style</a:t>
             </a:r>
-            <a:endParaRPr lang="en-US"/>
           </a:p>
         </p:txBody>
       </p:sp>
@@ -2656,38 +2652,37 @@
           <a:p>
             <a:pPr lvl="0"/>
             <a:r>
-              <a:rPr lang="en-US" smtClean="0"/>
+              <a:rPr lang="en-US"/>
               <a:t>Click to edit Master text styles</a:t>
             </a:r>
           </a:p>
           <a:p>
             <a:pPr lvl="1"/>
             <a:r>
-              <a:rPr lang="en-US" smtClean="0"/>
+              <a:rPr lang="en-US"/>
               <a:t>Second level</a:t>
             </a:r>
           </a:p>
           <a:p>
             <a:pPr lvl="2"/>
             <a:r>
-              <a:rPr lang="en-US" smtClean="0"/>
+              <a:rPr lang="en-US"/>
               <a:t>Third level</a:t>
             </a:r>
           </a:p>
           <a:p>
             <a:pPr lvl="3"/>
             <a:r>
-              <a:rPr lang="en-US" smtClean="0"/>
+              <a:rPr lang="en-US"/>
               <a:t>Fourth level</a:t>
             </a:r>
           </a:p>
           <a:p>
             <a:pPr lvl="4"/>
             <a:r>
-              <a:rPr lang="en-US" smtClean="0"/>
+              <a:rPr lang="en-US"/>
               <a:t>Fifth level</a:t>
             </a:r>
-            <a:endParaRPr lang="en-US"/>
           </a:p>
         </p:txBody>
       </p:sp>
@@ -2726,7 +2721,7 @@
           <a:p>
             <a:fld id="{5BCAD085-E8A6-8845-BD4E-CB4CCA059FC4}" type="datetimeFigureOut">
               <a:rPr lang="en-US" smtClean="0"/>
-              <a:t>1/27/13</a:t>
+              <a:t>4/19/2026</a:t>
             </a:fld>
             <a:endParaRPr lang="en-US"/>
           </a:p>
@@ -3085,7 +3080,7 @@
 </file>
 
 <file path=ppt/slides/slide1.xml><?xml version="1.0" encoding="utf-8"?>
-<p:sld xmlns:a="http://schemas.openxmlformats.org/drawingml/2006/main" xmlns:p="http://schemas.openxmlformats.org/presentationml/2006/main" xmlns:r="http://schemas.openxmlformats.org/officeDocument/2006/relationships">
+<p:sld xmlns:a="http://schemas.openxmlformats.org/drawingml/2006/main" xmlns:r="http://schemas.openxmlformats.org/officeDocument/2006/relationships" xmlns:p="http://schemas.openxmlformats.org/presentationml/2006/main">
   <p:cSld>
     <p:bg>
       <p:bgPr>
@@ -3101,7 +3096,14 @@
         <p:cNvGrpSpPr/>
         <p:nvPr/>
       </p:nvGrpSpPr>
-      <p:grpSpPr/>
+      <p:grpSpPr>
+        <a:xfrm>
+          <a:off x="0" y="0"/>
+          <a:ext cx="0" cy="0"/>
+          <a:chOff x="0" y="0"/>
+          <a:chExt cx="0" cy="0"/>
+        </a:xfrm>
+      </p:grpSpPr>
       <p:sp>
         <p:nvSpPr>
           <p:cNvPr id="2" name="Rectangle 1"/>
@@ -3142,6 +3144,7 @@
           <a:lstStyle/>
           <a:p>
             <a:pPr algn="ctr"/>
+            <a:endParaRPr/>
           </a:p>
         </p:txBody>
       </p:sp>
@@ -3185,6 +3188,7 @@
           <a:lstStyle/>
           <a:p>
             <a:pPr algn="ctr"/>
+            <a:endParaRPr/>
           </a:p>
         </p:txBody>
       </p:sp>
@@ -3228,6 +3232,7 @@
           <a:lstStyle/>
           <a:p>
             <a:pPr algn="ctr"/>
+            <a:endParaRPr/>
           </a:p>
         </p:txBody>
       </p:sp>
@@ -3240,7 +3245,7 @@
         <p:spPr>
           <a:xfrm>
             <a:off x="457200" y="2514600"/>
-            <a:ext cx="11247120" cy="1005840"/>
+            <a:ext cx="11247120" cy="830997"/>
           </a:xfrm>
           <a:prstGeom prst="rect">
             <a:avLst/>
@@ -3255,7 +3260,7 @@
           <a:p>
             <a:pPr algn="ctr"/>
             <a:r>
-              <a:rPr sz="4000" b="1" i="0">
+              <a:rPr sz="4800" b="1" i="0" dirty="0">
                 <a:solidFill>
                   <a:srgbClr val="FFFFFF"/>
                 </a:solidFill>
@@ -3275,7 +3280,7 @@
         <p:spPr>
           <a:xfrm>
             <a:off x="457200" y="3520440"/>
-            <a:ext cx="11247120" cy="548640"/>
+            <a:ext cx="11247120" cy="954107"/>
           </a:xfrm>
           <a:prstGeom prst="rect">
             <a:avLst/>
@@ -3290,7 +3295,7 @@
           <a:p>
             <a:pPr algn="ctr"/>
             <a:r>
-              <a:rPr sz="2000" b="0" i="0">
+              <a:rPr sz="2800" b="0" i="0" dirty="0">
                 <a:solidFill>
                   <a:srgbClr val="CADCFC"/>
                 </a:solidFill>
@@ -3298,76 +3303,30 @@
               </a:rPr>
               <a:t>CS 419  —  Spring 2026</a:t>
             </a:r>
-          </a:p>
-        </p:txBody>
-      </p:sp>
-      <p:sp>
-        <p:nvSpPr>
-          <p:cNvPr id="7" name="TextBox 6"/>
-          <p:cNvSpPr txBox="1"/>
-          <p:nvPr/>
-        </p:nvSpPr>
-        <p:spPr>
-          <a:xfrm>
-            <a:off x="457200" y="1188720"/>
-            <a:ext cx="11247120" cy="548640"/>
-          </a:xfrm>
-          <a:prstGeom prst="rect">
-            <a:avLst/>
-          </a:prstGeom>
-          <a:noFill/>
-        </p:spPr>
-        <p:txBody>
-          <a:bodyPr wrap="square">
-            <a:spAutoFit/>
-          </a:bodyPr>
-          <a:lstStyle/>
-          <a:p>
-            <a:pPr algn="ctr"/>
-            <a:r>
-              <a:rPr sz="1600" b="0" i="1">
+            <a:endParaRPr lang="en-US" sz="2800" b="0" i="0" dirty="0">
+              <a:solidFill>
+                <a:srgbClr val="CADCFC"/>
+              </a:solidFill>
+              <a:latin typeface="Calibri"/>
+            </a:endParaRPr>
+          </a:p>
+          <a:p>
+            <a:pPr algn="ctr"/>
+            <a:r>
+              <a:rPr lang="en-US" sz="2800" dirty="0">
                 <a:solidFill>
                   <a:srgbClr val="CADCFC"/>
                 </a:solidFill>
                 <a:latin typeface="Calibri"/>
               </a:rPr>
-              <a:t>Security Engineering Course Project</a:t>
-            </a:r>
-          </a:p>
-        </p:txBody>
-      </p:sp>
-      <p:sp>
-        <p:nvSpPr>
-          <p:cNvPr id="8" name="TextBox 7"/>
-          <p:cNvSpPr txBox="1"/>
-          <p:nvPr/>
-        </p:nvSpPr>
-        <p:spPr>
-          <a:xfrm>
-            <a:off x="457200" y="5669280"/>
-            <a:ext cx="11247120" cy="548640"/>
-          </a:xfrm>
-          <a:prstGeom prst="rect">
-            <a:avLst/>
-          </a:prstGeom>
-          <a:noFill/>
-        </p:spPr>
-        <p:txBody>
-          <a:bodyPr wrap="square">
-            <a:spAutoFit/>
-          </a:bodyPr>
-          <a:lstStyle/>
-          <a:p>
-            <a:pPr algn="ctr"/>
-            <a:r>
-              <a:rPr sz="1300" b="0" i="0">
-                <a:solidFill>
-                  <a:srgbClr val="8AA8E8"/>
-                </a:solidFill>
-                <a:latin typeface="Calibri"/>
-              </a:rPr>
-              <a:t>Flask  •  Fernet Encryption  •  RBAC  •  TLS  •  Audit Logging</a:t>
-            </a:r>
+              <a:t>Ayan Ashraf, Nilayan Lahiri</a:t>
+            </a:r>
+            <a:endParaRPr sz="2800" b="0" i="0" dirty="0">
+              <a:solidFill>
+                <a:srgbClr val="CADCFC"/>
+              </a:solidFill>
+              <a:latin typeface="Calibri"/>
+            </a:endParaRPr>
           </a:p>
         </p:txBody>
       </p:sp>
@@ -3380,7 +3339,7 @@
 </file>
 
 <file path=ppt/slides/slide2.xml><?xml version="1.0" encoding="utf-8"?>
-<p:sld xmlns:a="http://schemas.openxmlformats.org/drawingml/2006/main" xmlns:p="http://schemas.openxmlformats.org/presentationml/2006/main" xmlns:r="http://schemas.openxmlformats.org/officeDocument/2006/relationships">
+<p:sld xmlns:a="http://schemas.openxmlformats.org/drawingml/2006/main" xmlns:r="http://schemas.openxmlformats.org/officeDocument/2006/relationships" xmlns:p="http://schemas.openxmlformats.org/presentationml/2006/main">
   <p:cSld>
     <p:bg>
       <p:bgPr>
@@ -3396,7 +3355,14 @@
         <p:cNvGrpSpPr/>
         <p:nvPr/>
       </p:nvGrpSpPr>
-      <p:grpSpPr/>
+      <p:grpSpPr>
+        <a:xfrm>
+          <a:off x="0" y="0"/>
+          <a:ext cx="0" cy="0"/>
+          <a:chOff x="0" y="0"/>
+          <a:chExt cx="0" cy="0"/>
+        </a:xfrm>
+      </p:grpSpPr>
       <p:sp>
         <p:nvSpPr>
           <p:cNvPr id="2" name="Rectangle 1"/>
@@ -3437,6 +3403,7 @@
           <a:lstStyle/>
           <a:p>
             <a:pPr algn="ctr"/>
+            <a:endParaRPr/>
           </a:p>
         </p:txBody>
       </p:sp>
@@ -3484,7 +3451,7 @@
         <p:spPr>
           <a:xfrm>
             <a:off x="365760" y="1005840"/>
-            <a:ext cx="5486400" cy="457200"/>
+            <a:ext cx="5486400" cy="400110"/>
           </a:xfrm>
           <a:prstGeom prst="rect">
             <a:avLst/>
@@ -3499,7 +3466,7 @@
           <a:p>
             <a:pPr algn="l"/>
             <a:r>
-              <a:rPr sz="1600" b="1" i="0">
+              <a:rPr sz="2000" b="1" i="0" dirty="0">
                 <a:solidFill>
                   <a:srgbClr val="1E2761"/>
                 </a:solidFill>
@@ -3519,7 +3486,7 @@
         <p:spPr>
           <a:xfrm>
             <a:off x="365760" y="1463040"/>
-            <a:ext cx="5303520" cy="914400"/>
+            <a:ext cx="5303520" cy="584775"/>
           </a:xfrm>
           <a:prstGeom prst="rect">
             <a:avLst/>
@@ -3532,16 +3499,30 @@
           </a:bodyPr>
           <a:lstStyle/>
           <a:p>
-            <a:pPr algn="l"/>
-            <a:r>
-              <a:rPr sz="1200" b="0" i="0">
+            <a:r>
+              <a:rPr sz="1600" b="0" i="0" dirty="0">
                 <a:solidFill>
                   <a:srgbClr val="556580"/>
                 </a:solidFill>
                 <a:latin typeface="Calibri"/>
               </a:rPr>
-              <a:t>A web application that lets users securely upload, store, share, and manage documents — built with security as a first principle, not an afterthought.</a:t>
-            </a:r>
+              <a:t>A web application that lets users securely upload, store, share, and manage documents</a:t>
+            </a:r>
+            <a:r>
+              <a:rPr lang="en-US" sz="1600" dirty="0">
+                <a:solidFill>
+                  <a:srgbClr val="556580"/>
+                </a:solidFill>
+                <a:latin typeface="Calibri"/>
+              </a:rPr>
+              <a:t>.</a:t>
+            </a:r>
+            <a:endParaRPr sz="1600" b="0" i="0" dirty="0">
+              <a:solidFill>
+                <a:srgbClr val="556580"/>
+              </a:solidFill>
+              <a:latin typeface="Calibri"/>
+            </a:endParaRPr>
           </a:p>
         </p:txBody>
       </p:sp>
@@ -3620,6 +3601,7 @@
           <a:lstStyle/>
           <a:p>
             <a:pPr algn="ctr"/>
+            <a:endParaRPr/>
           </a:p>
         </p:txBody>
       </p:sp>
@@ -3632,7 +3614,7 @@
         <p:spPr>
           <a:xfrm>
             <a:off x="512064" y="2926080"/>
-            <a:ext cx="5212080" cy="347472"/>
+            <a:ext cx="5212080" cy="307777"/>
           </a:xfrm>
           <a:prstGeom prst="rect">
             <a:avLst/>
@@ -3647,7 +3629,7 @@
           <a:p>
             <a:pPr algn="l"/>
             <a:r>
-              <a:rPr sz="1150" b="0" i="0">
+              <a:rPr sz="1400" b="0" i="0" dirty="0">
                 <a:solidFill>
                   <a:srgbClr val="1E2761"/>
                 </a:solidFill>
@@ -3698,6 +3680,7 @@
           <a:lstStyle/>
           <a:p>
             <a:pPr algn="ctr"/>
+            <a:endParaRPr/>
           </a:p>
         </p:txBody>
       </p:sp>
@@ -3710,7 +3693,7 @@
         <p:spPr>
           <a:xfrm>
             <a:off x="512064" y="3273552"/>
-            <a:ext cx="5212080" cy="347472"/>
+            <a:ext cx="5212080" cy="307777"/>
           </a:xfrm>
           <a:prstGeom prst="rect">
             <a:avLst/>
@@ -3725,7 +3708,7 @@
           <a:p>
             <a:pPr algn="l"/>
             <a:r>
-              <a:rPr sz="1150" b="0" i="0">
+              <a:rPr sz="1400" b="0" i="0">
                 <a:solidFill>
                   <a:srgbClr val="1E2761"/>
                 </a:solidFill>
@@ -3776,6 +3759,7 @@
           <a:lstStyle/>
           <a:p>
             <a:pPr algn="ctr"/>
+            <a:endParaRPr/>
           </a:p>
         </p:txBody>
       </p:sp>
@@ -3788,7 +3772,7 @@
         <p:spPr>
           <a:xfrm>
             <a:off x="512064" y="3621024"/>
-            <a:ext cx="5212080" cy="347472"/>
+            <a:ext cx="5212080" cy="307777"/>
           </a:xfrm>
           <a:prstGeom prst="rect">
             <a:avLst/>
@@ -3803,7 +3787,7 @@
           <a:p>
             <a:pPr algn="l"/>
             <a:r>
-              <a:rPr sz="1150" b="0" i="0">
+              <a:rPr sz="1400" b="0" i="0">
                 <a:solidFill>
                   <a:srgbClr val="1E2761"/>
                 </a:solidFill>
@@ -3854,6 +3838,7 @@
           <a:lstStyle/>
           <a:p>
             <a:pPr algn="ctr"/>
+            <a:endParaRPr/>
           </a:p>
         </p:txBody>
       </p:sp>
@@ -3866,7 +3851,7 @@
         <p:spPr>
           <a:xfrm>
             <a:off x="512064" y="3968496"/>
-            <a:ext cx="5212080" cy="347472"/>
+            <a:ext cx="5212080" cy="307777"/>
           </a:xfrm>
           <a:prstGeom prst="rect">
             <a:avLst/>
@@ -3881,7 +3866,7 @@
           <a:p>
             <a:pPr algn="l"/>
             <a:r>
-              <a:rPr sz="1150" b="0" i="0">
+              <a:rPr sz="1400" b="0" i="0">
                 <a:solidFill>
                   <a:srgbClr val="1E2761"/>
                 </a:solidFill>
@@ -3932,6 +3917,7 @@
           <a:lstStyle/>
           <a:p>
             <a:pPr algn="ctr"/>
+            <a:endParaRPr/>
           </a:p>
         </p:txBody>
       </p:sp>
@@ -3944,7 +3930,7 @@
         <p:spPr>
           <a:xfrm>
             <a:off x="512064" y="4315968"/>
-            <a:ext cx="5212080" cy="347472"/>
+            <a:ext cx="5212080" cy="307777"/>
           </a:xfrm>
           <a:prstGeom prst="rect">
             <a:avLst/>
@@ -3959,7 +3945,7 @@
           <a:p>
             <a:pPr algn="l"/>
             <a:r>
-              <a:rPr sz="1150" b="0" i="0">
+              <a:rPr sz="1400" b="0" i="0">
                 <a:solidFill>
                   <a:srgbClr val="1E2761"/>
                 </a:solidFill>
@@ -4010,6 +3996,7 @@
           <a:lstStyle/>
           <a:p>
             <a:pPr algn="ctr"/>
+            <a:endParaRPr/>
           </a:p>
         </p:txBody>
       </p:sp>
@@ -4053,6 +4040,7 @@
           <a:lstStyle/>
           <a:p>
             <a:pPr algn="ctr"/>
+            <a:endParaRPr/>
           </a:p>
         </p:txBody>
       </p:sp>
@@ -4166,6 +4154,7 @@
           <a:lstStyle/>
           <a:p>
             <a:pPr algn="ctr"/>
+            <a:endParaRPr/>
           </a:p>
         </p:txBody>
       </p:sp>
@@ -4209,6 +4198,7 @@
           <a:lstStyle/>
           <a:p>
             <a:pPr algn="ctr"/>
+            <a:endParaRPr/>
           </a:p>
         </p:txBody>
       </p:sp>
@@ -4322,6 +4312,7 @@
           <a:lstStyle/>
           <a:p>
             <a:pPr algn="ctr"/>
+            <a:endParaRPr/>
           </a:p>
         </p:txBody>
       </p:sp>
@@ -4365,6 +4356,7 @@
           <a:lstStyle/>
           <a:p>
             <a:pPr algn="ctr"/>
+            <a:endParaRPr/>
           </a:p>
         </p:txBody>
       </p:sp>
@@ -4478,6 +4470,7 @@
           <a:lstStyle/>
           <a:p>
             <a:pPr algn="ctr"/>
+            <a:endParaRPr/>
           </a:p>
         </p:txBody>
       </p:sp>
@@ -4521,6 +4514,7 @@
           <a:lstStyle/>
           <a:p>
             <a:pPr algn="ctr"/>
+            <a:endParaRPr/>
           </a:p>
         </p:txBody>
       </p:sp>
@@ -4603,7 +4597,7 @@
 </file>
 
 <file path=ppt/slides/slide3.xml><?xml version="1.0" encoding="utf-8"?>
-<p:sld xmlns:a="http://schemas.openxmlformats.org/drawingml/2006/main" xmlns:p="http://schemas.openxmlformats.org/presentationml/2006/main" xmlns:r="http://schemas.openxmlformats.org/officeDocument/2006/relationships">
+<p:sld xmlns:a="http://schemas.openxmlformats.org/drawingml/2006/main" xmlns:r="http://schemas.openxmlformats.org/officeDocument/2006/relationships" xmlns:p="http://schemas.openxmlformats.org/presentationml/2006/main">
   <p:cSld>
     <p:bg>
       <p:bgPr>
@@ -4619,7 +4613,14 @@
         <p:cNvGrpSpPr/>
         <p:nvPr/>
       </p:nvGrpSpPr>
-      <p:grpSpPr/>
+      <p:grpSpPr>
+        <a:xfrm>
+          <a:off x="0" y="0"/>
+          <a:ext cx="0" cy="0"/>
+          <a:chOff x="0" y="0"/>
+          <a:chExt cx="0" cy="0"/>
+        </a:xfrm>
+      </p:grpSpPr>
       <p:sp>
         <p:nvSpPr>
           <p:cNvPr id="2" name="Rectangle 1"/>
@@ -4660,6 +4661,7 @@
           <a:lstStyle/>
           <a:p>
             <a:pPr algn="ctr"/>
+            <a:endParaRPr/>
           </a:p>
         </p:txBody>
       </p:sp>
@@ -4738,6 +4740,7 @@
           <a:lstStyle/>
           <a:p>
             <a:pPr algn="ctr"/>
+            <a:endParaRPr/>
           </a:p>
         </p:txBody>
       </p:sp>
@@ -4852,6 +4855,7 @@
           <a:lstStyle/>
           <a:p>
             <a:pPr algn="ctr"/>
+            <a:endParaRPr/>
           </a:p>
         </p:txBody>
       </p:sp>
@@ -4895,6 +4899,7 @@
           <a:lstStyle/>
           <a:p>
             <a:pPr algn="ctr"/>
+            <a:endParaRPr/>
           </a:p>
         </p:txBody>
       </p:sp>
@@ -5009,6 +5014,7 @@
           <a:lstStyle/>
           <a:p>
             <a:pPr algn="ctr"/>
+            <a:endParaRPr/>
           </a:p>
         </p:txBody>
       </p:sp>
@@ -5052,6 +5058,7 @@
           <a:lstStyle/>
           <a:p>
             <a:pPr algn="ctr"/>
+            <a:endParaRPr/>
           </a:p>
         </p:txBody>
       </p:sp>
@@ -5166,6 +5173,7 @@
           <a:lstStyle/>
           <a:p>
             <a:pPr algn="ctr"/>
+            <a:endParaRPr/>
           </a:p>
         </p:txBody>
       </p:sp>
@@ -5209,6 +5217,7 @@
           <a:lstStyle/>
           <a:p>
             <a:pPr algn="ctr"/>
+            <a:endParaRPr/>
           </a:p>
         </p:txBody>
       </p:sp>
@@ -5358,6 +5367,7 @@
           <a:lstStyle/>
           <a:p>
             <a:pPr algn="ctr"/>
+            <a:endParaRPr/>
           </a:p>
         </p:txBody>
       </p:sp>
@@ -5401,6 +5411,7 @@
           <a:lstStyle/>
           <a:p>
             <a:pPr algn="ctr"/>
+            <a:endParaRPr/>
           </a:p>
         </p:txBody>
       </p:sp>
@@ -5444,6 +5455,7 @@
           <a:lstStyle/>
           <a:p>
             <a:pPr algn="ctr"/>
+            <a:endParaRPr/>
           </a:p>
         </p:txBody>
       </p:sp>
@@ -5456,7 +5468,7 @@
         <p:spPr>
           <a:xfrm>
             <a:off x="457200" y="3493008"/>
-            <a:ext cx="3291839" cy="320040"/>
+            <a:ext cx="3291839" cy="338554"/>
           </a:xfrm>
           <a:prstGeom prst="rect">
             <a:avLst/>
@@ -5471,7 +5483,7 @@
           <a:p>
             <a:pPr algn="l"/>
             <a:r>
-              <a:rPr sz="1200" b="1" i="0">
+              <a:rPr sz="1600" b="1" i="0" dirty="0">
                 <a:solidFill>
                   <a:srgbClr val="1E2761"/>
                 </a:solidFill>
@@ -5491,7 +5503,7 @@
         <p:spPr>
           <a:xfrm>
             <a:off x="457200" y="3822191"/>
-            <a:ext cx="3291839" cy="548640"/>
+            <a:ext cx="3291839" cy="261610"/>
           </a:xfrm>
           <a:prstGeom prst="rect">
             <a:avLst/>
@@ -5506,7 +5518,7 @@
           <a:p>
             <a:pPr algn="l"/>
             <a:r>
-              <a:rPr sz="1000" b="0" i="0">
+              <a:rPr sz="1100" b="0" i="0">
                 <a:solidFill>
                   <a:srgbClr val="556580"/>
                 </a:solidFill>
@@ -5557,6 +5569,7 @@
           <a:lstStyle/>
           <a:p>
             <a:pPr algn="ctr"/>
+            <a:endParaRPr/>
           </a:p>
         </p:txBody>
       </p:sp>
@@ -5600,6 +5613,7 @@
           <a:lstStyle/>
           <a:p>
             <a:pPr algn="ctr"/>
+            <a:endParaRPr/>
           </a:p>
         </p:txBody>
       </p:sp>
@@ -5643,6 +5657,7 @@
           <a:lstStyle/>
           <a:p>
             <a:pPr algn="ctr"/>
+            <a:endParaRPr/>
           </a:p>
         </p:txBody>
       </p:sp>
@@ -5655,7 +5670,7 @@
         <p:spPr>
           <a:xfrm>
             <a:off x="4206240" y="3493008"/>
-            <a:ext cx="3291839" cy="320040"/>
+            <a:ext cx="3291839" cy="338554"/>
           </a:xfrm>
           <a:prstGeom prst="rect">
             <a:avLst/>
@@ -5670,7 +5685,7 @@
           <a:p>
             <a:pPr algn="l"/>
             <a:r>
-              <a:rPr sz="1200" b="1" i="0">
+              <a:rPr sz="1600" b="1" i="0">
                 <a:solidFill>
                   <a:srgbClr val="1E2761"/>
                 </a:solidFill>
@@ -5690,7 +5705,7 @@
         <p:spPr>
           <a:xfrm>
             <a:off x="4206240" y="3822191"/>
-            <a:ext cx="3291839" cy="548640"/>
+            <a:ext cx="3291839" cy="261610"/>
           </a:xfrm>
           <a:prstGeom prst="rect">
             <a:avLst/>
@@ -5705,7 +5720,7 @@
           <a:p>
             <a:pPr algn="l"/>
             <a:r>
-              <a:rPr sz="1000" b="0" i="0">
+              <a:rPr sz="1100" b="0" i="0">
                 <a:solidFill>
                   <a:srgbClr val="556580"/>
                 </a:solidFill>
@@ -5756,6 +5771,7 @@
           <a:lstStyle/>
           <a:p>
             <a:pPr algn="ctr"/>
+            <a:endParaRPr/>
           </a:p>
         </p:txBody>
       </p:sp>
@@ -5799,6 +5815,7 @@
           <a:lstStyle/>
           <a:p>
             <a:pPr algn="ctr"/>
+            <a:endParaRPr/>
           </a:p>
         </p:txBody>
       </p:sp>
@@ -5842,6 +5859,7 @@
           <a:lstStyle/>
           <a:p>
             <a:pPr algn="ctr"/>
+            <a:endParaRPr/>
           </a:p>
         </p:txBody>
       </p:sp>
@@ -5854,7 +5872,7 @@
         <p:spPr>
           <a:xfrm>
             <a:off x="7955279" y="3493008"/>
-            <a:ext cx="3291839" cy="320040"/>
+            <a:ext cx="3291839" cy="338554"/>
           </a:xfrm>
           <a:prstGeom prst="rect">
             <a:avLst/>
@@ -5869,7 +5887,7 @@
           <a:p>
             <a:pPr algn="l"/>
             <a:r>
-              <a:rPr sz="1200" b="1" i="0">
+              <a:rPr sz="1600" b="1" i="0">
                 <a:solidFill>
                   <a:srgbClr val="1E2761"/>
                 </a:solidFill>
@@ -5889,7 +5907,7 @@
         <p:spPr>
           <a:xfrm>
             <a:off x="7955279" y="3822191"/>
-            <a:ext cx="3291839" cy="548640"/>
+            <a:ext cx="3291839" cy="261610"/>
           </a:xfrm>
           <a:prstGeom prst="rect">
             <a:avLst/>
@@ -5904,7 +5922,7 @@
           <a:p>
             <a:pPr algn="l"/>
             <a:r>
-              <a:rPr sz="1000" b="0" i="0">
+              <a:rPr sz="1100" b="0" i="0">
                 <a:solidFill>
                   <a:srgbClr val="556580"/>
                 </a:solidFill>
@@ -5955,6 +5973,7 @@
           <a:lstStyle/>
           <a:p>
             <a:pPr algn="ctr"/>
+            <a:endParaRPr/>
           </a:p>
         </p:txBody>
       </p:sp>
@@ -5998,6 +6017,7 @@
           <a:lstStyle/>
           <a:p>
             <a:pPr algn="ctr"/>
+            <a:endParaRPr/>
           </a:p>
         </p:txBody>
       </p:sp>
@@ -6041,6 +6061,7 @@
           <a:lstStyle/>
           <a:p>
             <a:pPr algn="ctr"/>
+            <a:endParaRPr/>
           </a:p>
         </p:txBody>
       </p:sp>
@@ -6053,7 +6074,7 @@
         <p:spPr>
           <a:xfrm>
             <a:off x="457200" y="4773168"/>
-            <a:ext cx="3291839" cy="320040"/>
+            <a:ext cx="3291839" cy="338554"/>
           </a:xfrm>
           <a:prstGeom prst="rect">
             <a:avLst/>
@@ -6068,7 +6089,7 @@
           <a:p>
             <a:pPr algn="l"/>
             <a:r>
-              <a:rPr sz="1200" b="1" i="0">
+              <a:rPr sz="1600" b="1" i="0">
                 <a:solidFill>
                   <a:srgbClr val="1E2761"/>
                 </a:solidFill>
@@ -6088,7 +6109,7 @@
         <p:spPr>
           <a:xfrm>
             <a:off x="457200" y="5102352"/>
-            <a:ext cx="3291839" cy="548640"/>
+            <a:ext cx="3291839" cy="261610"/>
           </a:xfrm>
           <a:prstGeom prst="rect">
             <a:avLst/>
@@ -6103,7 +6124,7 @@
           <a:p>
             <a:pPr algn="l"/>
             <a:r>
-              <a:rPr sz="1000" b="0" i="0">
+              <a:rPr sz="1100" b="0" i="0">
                 <a:solidFill>
                   <a:srgbClr val="556580"/>
                 </a:solidFill>
@@ -6154,6 +6175,7 @@
           <a:lstStyle/>
           <a:p>
             <a:pPr algn="ctr"/>
+            <a:endParaRPr/>
           </a:p>
         </p:txBody>
       </p:sp>
@@ -6197,6 +6219,7 @@
           <a:lstStyle/>
           <a:p>
             <a:pPr algn="ctr"/>
+            <a:endParaRPr/>
           </a:p>
         </p:txBody>
       </p:sp>
@@ -6240,6 +6263,7 @@
           <a:lstStyle/>
           <a:p>
             <a:pPr algn="ctr"/>
+            <a:endParaRPr/>
           </a:p>
         </p:txBody>
       </p:sp>
@@ -6252,7 +6276,7 @@
         <p:spPr>
           <a:xfrm>
             <a:off x="4206240" y="4773168"/>
-            <a:ext cx="3291839" cy="320040"/>
+            <a:ext cx="3291839" cy="338554"/>
           </a:xfrm>
           <a:prstGeom prst="rect">
             <a:avLst/>
@@ -6267,7 +6291,7 @@
           <a:p>
             <a:pPr algn="l"/>
             <a:r>
-              <a:rPr sz="1200" b="1" i="0">
+              <a:rPr sz="1600" b="1" i="0">
                 <a:solidFill>
                   <a:srgbClr val="1E2761"/>
                 </a:solidFill>
@@ -6287,7 +6311,7 @@
         <p:spPr>
           <a:xfrm>
             <a:off x="4206240" y="5102352"/>
-            <a:ext cx="3291839" cy="548640"/>
+            <a:ext cx="3291839" cy="261610"/>
           </a:xfrm>
           <a:prstGeom prst="rect">
             <a:avLst/>
@@ -6302,7 +6326,7 @@
           <a:p>
             <a:pPr algn="l"/>
             <a:r>
-              <a:rPr sz="1000" b="0" i="0">
+              <a:rPr sz="1100" b="0" i="0">
                 <a:solidFill>
                   <a:srgbClr val="556580"/>
                 </a:solidFill>
@@ -6353,6 +6377,7 @@
           <a:lstStyle/>
           <a:p>
             <a:pPr algn="ctr"/>
+            <a:endParaRPr/>
           </a:p>
         </p:txBody>
       </p:sp>
@@ -6396,6 +6421,7 @@
           <a:lstStyle/>
           <a:p>
             <a:pPr algn="ctr"/>
+            <a:endParaRPr/>
           </a:p>
         </p:txBody>
       </p:sp>
@@ -6439,6 +6465,7 @@
           <a:lstStyle/>
           <a:p>
             <a:pPr algn="ctr"/>
+            <a:endParaRPr/>
           </a:p>
         </p:txBody>
       </p:sp>
@@ -6451,7 +6478,7 @@
         <p:spPr>
           <a:xfrm>
             <a:off x="7955279" y="4773168"/>
-            <a:ext cx="3291839" cy="320040"/>
+            <a:ext cx="3291839" cy="338554"/>
           </a:xfrm>
           <a:prstGeom prst="rect">
             <a:avLst/>
@@ -6466,7 +6493,7 @@
           <a:p>
             <a:pPr algn="l"/>
             <a:r>
-              <a:rPr sz="1200" b="1" i="0">
+              <a:rPr sz="1600" b="1" i="0">
                 <a:solidFill>
                   <a:srgbClr val="1E2761"/>
                 </a:solidFill>
@@ -6486,7 +6513,7 @@
         <p:spPr>
           <a:xfrm>
             <a:off x="7955279" y="5102352"/>
-            <a:ext cx="3291839" cy="548640"/>
+            <a:ext cx="3291839" cy="261610"/>
           </a:xfrm>
           <a:prstGeom prst="rect">
             <a:avLst/>
@@ -6501,7 +6528,7 @@
           <a:p>
             <a:pPr algn="l"/>
             <a:r>
-              <a:rPr sz="1000" b="0" i="0">
+              <a:rPr sz="1100" b="0" i="0">
                 <a:solidFill>
                   <a:srgbClr val="556580"/>
                 </a:solidFill>
@@ -6521,7 +6548,7 @@
 </file>
 
 <file path=ppt/slides/slide4.xml><?xml version="1.0" encoding="utf-8"?>
-<p:sld xmlns:a="http://schemas.openxmlformats.org/drawingml/2006/main" xmlns:p="http://schemas.openxmlformats.org/presentationml/2006/main" xmlns:r="http://schemas.openxmlformats.org/officeDocument/2006/relationships">
+<p:sld xmlns:a="http://schemas.openxmlformats.org/drawingml/2006/main" xmlns:r="http://schemas.openxmlformats.org/officeDocument/2006/relationships" xmlns:p="http://schemas.openxmlformats.org/presentationml/2006/main">
   <p:cSld>
     <p:bg>
       <p:bgPr>
@@ -6537,7 +6564,14 @@
         <p:cNvGrpSpPr/>
         <p:nvPr/>
       </p:nvGrpSpPr>
-      <p:grpSpPr/>
+      <p:grpSpPr>
+        <a:xfrm>
+          <a:off x="0" y="0"/>
+          <a:ext cx="0" cy="0"/>
+          <a:chOff x="0" y="0"/>
+          <a:chExt cx="0" cy="0"/>
+        </a:xfrm>
+      </p:grpSpPr>
       <p:sp>
         <p:nvSpPr>
           <p:cNvPr id="2" name="Rectangle 1"/>
@@ -6578,6 +6612,7 @@
           <a:lstStyle/>
           <a:p>
             <a:pPr algn="ctr"/>
+            <a:endParaRPr/>
           </a:p>
         </p:txBody>
       </p:sp>
@@ -6656,6 +6691,7 @@
           <a:lstStyle/>
           <a:p>
             <a:pPr algn="ctr"/>
+            <a:endParaRPr sz="2400"/>
           </a:p>
         </p:txBody>
       </p:sp>
@@ -6699,6 +6735,7 @@
           <a:lstStyle/>
           <a:p>
             <a:pPr algn="ctr"/>
+            <a:endParaRPr sz="2400"/>
           </a:p>
         </p:txBody>
       </p:sp>
@@ -6742,6 +6779,7 @@
           <a:lstStyle/>
           <a:p>
             <a:pPr algn="ctr"/>
+            <a:endParaRPr sz="2400"/>
           </a:p>
         </p:txBody>
       </p:sp>
@@ -6754,7 +6792,7 @@
         <p:spPr>
           <a:xfrm>
             <a:off x="502920" y="1051560"/>
-            <a:ext cx="5166360" cy="347472"/>
+            <a:ext cx="5166360" cy="338554"/>
           </a:xfrm>
           <a:prstGeom prst="rect">
             <a:avLst/>
@@ -6769,7 +6807,7 @@
           <a:p>
             <a:pPr algn="l"/>
             <a:r>
-              <a:rPr sz="1300" b="1" i="0">
+              <a:rPr sz="1600" b="1" i="0">
                 <a:solidFill>
                   <a:srgbClr val="1E2761"/>
                 </a:solidFill>
@@ -6789,7 +6827,7 @@
         <p:spPr>
           <a:xfrm>
             <a:off x="502920" y="1435608"/>
-            <a:ext cx="5166360" cy="777240"/>
+            <a:ext cx="5166360" cy="461665"/>
           </a:xfrm>
           <a:prstGeom prst="rect">
             <a:avLst/>
@@ -6804,7 +6842,7 @@
           <a:p>
             <a:pPr algn="l"/>
             <a:r>
-              <a:rPr sz="1050" b="0" i="0">
+              <a:rPr sz="1200" b="0" i="0">
                 <a:solidFill>
                   <a:srgbClr val="556580"/>
                 </a:solidFill>
@@ -6855,6 +6893,7 @@
           <a:lstStyle/>
           <a:p>
             <a:pPr algn="ctr"/>
+            <a:endParaRPr sz="2400"/>
           </a:p>
         </p:txBody>
       </p:sp>
@@ -6898,6 +6937,7 @@
           <a:lstStyle/>
           <a:p>
             <a:pPr algn="ctr"/>
+            <a:endParaRPr sz="2400"/>
           </a:p>
         </p:txBody>
       </p:sp>
@@ -6941,6 +6981,7 @@
           <a:lstStyle/>
           <a:p>
             <a:pPr algn="ctr"/>
+            <a:endParaRPr sz="2400"/>
           </a:p>
         </p:txBody>
       </p:sp>
@@ -6953,7 +6994,7 @@
         <p:spPr>
           <a:xfrm>
             <a:off x="6537960" y="1051560"/>
-            <a:ext cx="5166360" cy="347472"/>
+            <a:ext cx="5166360" cy="338554"/>
           </a:xfrm>
           <a:prstGeom prst="rect">
             <a:avLst/>
@@ -6968,7 +7009,7 @@
           <a:p>
             <a:pPr algn="l"/>
             <a:r>
-              <a:rPr sz="1300" b="1" i="0">
+              <a:rPr sz="1600" b="1" i="0">
                 <a:solidFill>
                   <a:srgbClr val="1E2761"/>
                 </a:solidFill>
@@ -6988,7 +7029,7 @@
         <p:spPr>
           <a:xfrm>
             <a:off x="6537960" y="1435608"/>
-            <a:ext cx="5166360" cy="777240"/>
+            <a:ext cx="5166360" cy="461665"/>
           </a:xfrm>
           <a:prstGeom prst="rect">
             <a:avLst/>
@@ -7003,7 +7044,7 @@
           <a:p>
             <a:pPr algn="l"/>
             <a:r>
-              <a:rPr sz="1050" b="0" i="0">
+              <a:rPr sz="1200" b="0" i="0">
                 <a:solidFill>
                   <a:srgbClr val="556580"/>
                 </a:solidFill>
@@ -7054,6 +7095,7 @@
           <a:lstStyle/>
           <a:p>
             <a:pPr algn="ctr"/>
+            <a:endParaRPr sz="2400"/>
           </a:p>
         </p:txBody>
       </p:sp>
@@ -7097,6 +7139,7 @@
           <a:lstStyle/>
           <a:p>
             <a:pPr algn="ctr"/>
+            <a:endParaRPr sz="2400"/>
           </a:p>
         </p:txBody>
       </p:sp>
@@ -7140,6 +7183,7 @@
           <a:lstStyle/>
           <a:p>
             <a:pPr algn="ctr"/>
+            <a:endParaRPr sz="2400"/>
           </a:p>
         </p:txBody>
       </p:sp>
@@ -7152,7 +7196,7 @@
         <p:spPr>
           <a:xfrm>
             <a:off x="502920" y="2542032"/>
-            <a:ext cx="5166360" cy="347472"/>
+            <a:ext cx="5166360" cy="338554"/>
           </a:xfrm>
           <a:prstGeom prst="rect">
             <a:avLst/>
@@ -7167,7 +7211,7 @@
           <a:p>
             <a:pPr algn="l"/>
             <a:r>
-              <a:rPr sz="1300" b="1" i="0">
+              <a:rPr sz="1600" b="1" i="0">
                 <a:solidFill>
                   <a:srgbClr val="1E2761"/>
                 </a:solidFill>
@@ -7187,7 +7231,7 @@
         <p:spPr>
           <a:xfrm>
             <a:off x="502920" y="2926079"/>
-            <a:ext cx="5166360" cy="777240"/>
+            <a:ext cx="5166360" cy="461665"/>
           </a:xfrm>
           <a:prstGeom prst="rect">
             <a:avLst/>
@@ -7202,7 +7246,7 @@
           <a:p>
             <a:pPr algn="l"/>
             <a:r>
-              <a:rPr sz="1050" b="0" i="0">
+              <a:rPr sz="1200" b="0" i="0">
                 <a:solidFill>
                   <a:srgbClr val="556580"/>
                 </a:solidFill>
@@ -7253,6 +7297,7 @@
           <a:lstStyle/>
           <a:p>
             <a:pPr algn="ctr"/>
+            <a:endParaRPr sz="2400"/>
           </a:p>
         </p:txBody>
       </p:sp>
@@ -7296,6 +7341,7 @@
           <a:lstStyle/>
           <a:p>
             <a:pPr algn="ctr"/>
+            <a:endParaRPr sz="2400"/>
           </a:p>
         </p:txBody>
       </p:sp>
@@ -7339,6 +7385,7 @@
           <a:lstStyle/>
           <a:p>
             <a:pPr algn="ctr"/>
+            <a:endParaRPr sz="2400"/>
           </a:p>
         </p:txBody>
       </p:sp>
@@ -7351,7 +7398,7 @@
         <p:spPr>
           <a:xfrm>
             <a:off x="6537960" y="2542032"/>
-            <a:ext cx="5166360" cy="347472"/>
+            <a:ext cx="5166360" cy="338554"/>
           </a:xfrm>
           <a:prstGeom prst="rect">
             <a:avLst/>
@@ -7366,7 +7413,7 @@
           <a:p>
             <a:pPr algn="l"/>
             <a:r>
-              <a:rPr sz="1300" b="1" i="0">
+              <a:rPr sz="1600" b="1" i="0">
                 <a:solidFill>
                   <a:srgbClr val="1E2761"/>
                 </a:solidFill>
@@ -7386,7 +7433,7 @@
         <p:spPr>
           <a:xfrm>
             <a:off x="6537960" y="2926079"/>
-            <a:ext cx="5166360" cy="777240"/>
+            <a:ext cx="5166360" cy="461665"/>
           </a:xfrm>
           <a:prstGeom prst="rect">
             <a:avLst/>
@@ -7401,7 +7448,7 @@
           <a:p>
             <a:pPr algn="l"/>
             <a:r>
-              <a:rPr sz="1050" b="0" i="0">
+              <a:rPr sz="1200" b="0" i="0">
                 <a:solidFill>
                   <a:srgbClr val="556580"/>
                 </a:solidFill>
@@ -7452,6 +7499,7 @@
           <a:lstStyle/>
           <a:p>
             <a:pPr algn="ctr"/>
+            <a:endParaRPr/>
           </a:p>
         </p:txBody>
       </p:sp>
@@ -7495,6 +7543,7 @@
           <a:lstStyle/>
           <a:p>
             <a:pPr algn="ctr"/>
+            <a:endParaRPr/>
           </a:p>
         </p:txBody>
       </p:sp>
@@ -7538,6 +7587,7 @@
           <a:lstStyle/>
           <a:p>
             <a:pPr algn="ctr"/>
+            <a:endParaRPr/>
           </a:p>
         </p:txBody>
       </p:sp>
@@ -7550,7 +7600,7 @@
         <p:spPr>
           <a:xfrm>
             <a:off x="502920" y="4032503"/>
-            <a:ext cx="5166360" cy="347472"/>
+            <a:ext cx="5166360" cy="338554"/>
           </a:xfrm>
           <a:prstGeom prst="rect">
             <a:avLst/>
@@ -7565,7 +7615,7 @@
           <a:p>
             <a:pPr algn="l"/>
             <a:r>
-              <a:rPr sz="1300" b="1" i="0">
+              <a:rPr sz="1600" b="1" i="0">
                 <a:solidFill>
                   <a:srgbClr val="1E2761"/>
                 </a:solidFill>
@@ -7585,7 +7635,7 @@
         <p:spPr>
           <a:xfrm>
             <a:off x="502920" y="4416552"/>
-            <a:ext cx="5166360" cy="777240"/>
+            <a:ext cx="5166360" cy="461665"/>
           </a:xfrm>
           <a:prstGeom prst="rect">
             <a:avLst/>
@@ -7600,7 +7650,7 @@
           <a:p>
             <a:pPr algn="l"/>
             <a:r>
-              <a:rPr sz="1050" b="0" i="0">
+              <a:rPr sz="1200" b="0" i="0">
                 <a:solidFill>
                   <a:srgbClr val="556580"/>
                 </a:solidFill>
@@ -7651,6 +7701,7 @@
           <a:lstStyle/>
           <a:p>
             <a:pPr algn="ctr"/>
+            <a:endParaRPr/>
           </a:p>
         </p:txBody>
       </p:sp>
@@ -7694,6 +7745,7 @@
           <a:lstStyle/>
           <a:p>
             <a:pPr algn="ctr"/>
+            <a:endParaRPr/>
           </a:p>
         </p:txBody>
       </p:sp>
@@ -7737,6 +7789,7 @@
           <a:lstStyle/>
           <a:p>
             <a:pPr algn="ctr"/>
+            <a:endParaRPr/>
           </a:p>
         </p:txBody>
       </p:sp>
@@ -7749,7 +7802,7 @@
         <p:spPr>
           <a:xfrm>
             <a:off x="6537960" y="4032503"/>
-            <a:ext cx="5166360" cy="347472"/>
+            <a:ext cx="5166360" cy="338554"/>
           </a:xfrm>
           <a:prstGeom prst="rect">
             <a:avLst/>
@@ -7764,7 +7817,7 @@
           <a:p>
             <a:pPr algn="l"/>
             <a:r>
-              <a:rPr sz="1300" b="1" i="0">
+              <a:rPr sz="1600" b="1" i="0">
                 <a:solidFill>
                   <a:srgbClr val="1E2761"/>
                 </a:solidFill>
@@ -7784,7 +7837,7 @@
         <p:spPr>
           <a:xfrm>
             <a:off x="6537960" y="4416552"/>
-            <a:ext cx="5166360" cy="777240"/>
+            <a:ext cx="5166360" cy="461665"/>
           </a:xfrm>
           <a:prstGeom prst="rect">
             <a:avLst/>
@@ -7799,7 +7852,7 @@
           <a:p>
             <a:pPr algn="l"/>
             <a:r>
-              <a:rPr sz="1050" b="0" i="0">
+              <a:rPr sz="1200" b="0" i="0">
                 <a:solidFill>
                   <a:srgbClr val="556580"/>
                 </a:solidFill>
@@ -7819,7 +7872,7 @@
 </file>
 
 <file path=ppt/slides/slide5.xml><?xml version="1.0" encoding="utf-8"?>
-<p:sld xmlns:a="http://schemas.openxmlformats.org/drawingml/2006/main" xmlns:p="http://schemas.openxmlformats.org/presentationml/2006/main" xmlns:r="http://schemas.openxmlformats.org/officeDocument/2006/relationships">
+<p:sld xmlns:a="http://schemas.openxmlformats.org/drawingml/2006/main" xmlns:r="http://schemas.openxmlformats.org/officeDocument/2006/relationships" xmlns:p="http://schemas.openxmlformats.org/presentationml/2006/main">
   <p:cSld>
     <p:bg>
       <p:bgPr>
@@ -7835,7 +7888,14 @@
         <p:cNvGrpSpPr/>
         <p:nvPr/>
       </p:nvGrpSpPr>
-      <p:grpSpPr/>
+      <p:grpSpPr>
+        <a:xfrm>
+          <a:off x="0" y="0"/>
+          <a:ext cx="0" cy="0"/>
+          <a:chOff x="0" y="0"/>
+          <a:chExt cx="0" cy="0"/>
+        </a:xfrm>
+      </p:grpSpPr>
       <p:sp>
         <p:nvSpPr>
           <p:cNvPr id="2" name="Rectangle 1"/>
@@ -7876,6 +7936,7 @@
           <a:lstStyle/>
           <a:p>
             <a:pPr algn="ctr"/>
+            <a:endParaRPr/>
           </a:p>
         </p:txBody>
       </p:sp>
@@ -7954,6 +8015,7 @@
           <a:lstStyle/>
           <a:p>
             <a:pPr algn="ctr"/>
+            <a:endParaRPr/>
           </a:p>
         </p:txBody>
       </p:sp>
@@ -7997,6 +8059,7 @@
           <a:lstStyle/>
           <a:p>
             <a:pPr algn="ctr"/>
+            <a:endParaRPr/>
           </a:p>
         </p:txBody>
       </p:sp>
@@ -8040,6 +8103,7 @@
           <a:lstStyle/>
           <a:p>
             <a:pPr algn="ctr"/>
+            <a:endParaRPr/>
           </a:p>
         </p:txBody>
       </p:sp>
@@ -8052,7 +8116,7 @@
         <p:spPr>
           <a:xfrm>
             <a:off x="973836" y="1051560"/>
-            <a:ext cx="1828800" cy="640080"/>
+            <a:ext cx="1828800" cy="769441"/>
           </a:xfrm>
           <a:prstGeom prst="rect">
             <a:avLst/>
@@ -8067,7 +8131,7 @@
           <a:p>
             <a:pPr algn="ctr"/>
             <a:r>
-              <a:rPr sz="3600" b="1" i="0">
+              <a:rPr sz="4400" b="1" i="0">
                 <a:solidFill>
                   <a:srgbClr val="DC2626"/>
                 </a:solidFill>
@@ -8087,7 +8151,7 @@
         <p:spPr>
           <a:xfrm>
             <a:off x="973836" y="1737360"/>
-            <a:ext cx="1828800" cy="347472"/>
+            <a:ext cx="1828800" cy="338554"/>
           </a:xfrm>
           <a:prstGeom prst="rect">
             <a:avLst/>
@@ -8102,7 +8166,7 @@
           <a:p>
             <a:pPr algn="ctr"/>
             <a:r>
-              <a:rPr sz="1200" b="0" i="0">
+              <a:rPr sz="1600" b="0" i="0">
                 <a:solidFill>
                   <a:srgbClr val="556580"/>
                 </a:solidFill>
@@ -8153,6 +8217,7 @@
           <a:lstStyle/>
           <a:p>
             <a:pPr algn="ctr"/>
+            <a:endParaRPr/>
           </a:p>
         </p:txBody>
       </p:sp>
@@ -8196,6 +8261,7 @@
           <a:lstStyle/>
           <a:p>
             <a:pPr algn="ctr"/>
+            <a:endParaRPr/>
           </a:p>
         </p:txBody>
       </p:sp>
@@ -8239,6 +8305,7 @@
           <a:lstStyle/>
           <a:p>
             <a:pPr algn="ctr"/>
+            <a:endParaRPr/>
           </a:p>
         </p:txBody>
       </p:sp>
@@ -8251,7 +8318,7 @@
         <p:spPr>
           <a:xfrm>
             <a:off x="3076956" y="1051560"/>
-            <a:ext cx="1828800" cy="640080"/>
+            <a:ext cx="1828800" cy="769441"/>
           </a:xfrm>
           <a:prstGeom prst="rect">
             <a:avLst/>
@@ -8266,7 +8333,7 @@
           <a:p>
             <a:pPr algn="ctr"/>
             <a:r>
-              <a:rPr sz="3600" b="1" i="0">
+              <a:rPr sz="4400" b="1" i="0">
                 <a:solidFill>
                   <a:srgbClr val="EA580C"/>
                 </a:solidFill>
@@ -8286,7 +8353,7 @@
         <p:spPr>
           <a:xfrm>
             <a:off x="3076956" y="1737360"/>
-            <a:ext cx="1828800" cy="347472"/>
+            <a:ext cx="1828800" cy="338554"/>
           </a:xfrm>
           <a:prstGeom prst="rect">
             <a:avLst/>
@@ -8301,7 +8368,7 @@
           <a:p>
             <a:pPr algn="ctr"/>
             <a:r>
-              <a:rPr sz="1200" b="0" i="0">
+              <a:rPr sz="1600" b="0" i="0">
                 <a:solidFill>
                   <a:srgbClr val="556580"/>
                 </a:solidFill>
@@ -8352,6 +8419,7 @@
           <a:lstStyle/>
           <a:p>
             <a:pPr algn="ctr"/>
+            <a:endParaRPr/>
           </a:p>
         </p:txBody>
       </p:sp>
@@ -8395,6 +8463,7 @@
           <a:lstStyle/>
           <a:p>
             <a:pPr algn="ctr"/>
+            <a:endParaRPr/>
           </a:p>
         </p:txBody>
       </p:sp>
@@ -8438,6 +8507,7 @@
           <a:lstStyle/>
           <a:p>
             <a:pPr algn="ctr"/>
+            <a:endParaRPr/>
           </a:p>
         </p:txBody>
       </p:sp>
@@ -8450,7 +8520,7 @@
         <p:spPr>
           <a:xfrm>
             <a:off x="5180075" y="1051560"/>
-            <a:ext cx="1828800" cy="640080"/>
+            <a:ext cx="1828800" cy="769441"/>
           </a:xfrm>
           <a:prstGeom prst="rect">
             <a:avLst/>
@@ -8465,7 +8535,7 @@
           <a:p>
             <a:pPr algn="ctr"/>
             <a:r>
-              <a:rPr sz="3600" b="1" i="0">
+              <a:rPr sz="4400" b="1" i="0">
                 <a:solidFill>
                   <a:srgbClr val="D97706"/>
                 </a:solidFill>
@@ -8485,7 +8555,7 @@
         <p:spPr>
           <a:xfrm>
             <a:off x="5180075" y="1737360"/>
-            <a:ext cx="1828800" cy="347472"/>
+            <a:ext cx="1828800" cy="338554"/>
           </a:xfrm>
           <a:prstGeom prst="rect">
             <a:avLst/>
@@ -8500,7 +8570,7 @@
           <a:p>
             <a:pPr algn="ctr"/>
             <a:r>
-              <a:rPr sz="1200" b="0" i="0">
+              <a:rPr sz="1600" b="0" i="0">
                 <a:solidFill>
                   <a:srgbClr val="556580"/>
                 </a:solidFill>
@@ -8551,6 +8621,7 @@
           <a:lstStyle/>
           <a:p>
             <a:pPr algn="ctr"/>
+            <a:endParaRPr/>
           </a:p>
         </p:txBody>
       </p:sp>
@@ -8594,6 +8665,7 @@
           <a:lstStyle/>
           <a:p>
             <a:pPr algn="ctr"/>
+            <a:endParaRPr/>
           </a:p>
         </p:txBody>
       </p:sp>
@@ -8637,6 +8709,7 @@
           <a:lstStyle/>
           <a:p>
             <a:pPr algn="ctr"/>
+            <a:endParaRPr/>
           </a:p>
         </p:txBody>
       </p:sp>
@@ -8649,7 +8722,7 @@
         <p:spPr>
           <a:xfrm>
             <a:off x="7283196" y="1051560"/>
-            <a:ext cx="1828800" cy="640080"/>
+            <a:ext cx="1828800" cy="769441"/>
           </a:xfrm>
           <a:prstGeom prst="rect">
             <a:avLst/>
@@ -8664,7 +8737,7 @@
           <a:p>
             <a:pPr algn="ctr"/>
             <a:r>
-              <a:rPr sz="3600" b="1" i="0">
+              <a:rPr sz="4400" b="1" i="0">
                 <a:solidFill>
                   <a:srgbClr val="1678D4"/>
                 </a:solidFill>
@@ -8684,7 +8757,7 @@
         <p:spPr>
           <a:xfrm>
             <a:off x="7283196" y="1737360"/>
-            <a:ext cx="1828800" cy="347472"/>
+            <a:ext cx="1828800" cy="338554"/>
           </a:xfrm>
           <a:prstGeom prst="rect">
             <a:avLst/>
@@ -8699,7 +8772,7 @@
           <a:p>
             <a:pPr algn="ctr"/>
             <a:r>
-              <a:rPr sz="1200" b="0" i="0">
+              <a:rPr sz="1600" b="0" i="0">
                 <a:solidFill>
                   <a:srgbClr val="556580"/>
                 </a:solidFill>
@@ -8750,6 +8823,7 @@
           <a:lstStyle/>
           <a:p>
             <a:pPr algn="ctr"/>
+            <a:endParaRPr/>
           </a:p>
         </p:txBody>
       </p:sp>
@@ -8793,6 +8867,7 @@
           <a:lstStyle/>
           <a:p>
             <a:pPr algn="ctr"/>
+            <a:endParaRPr/>
           </a:p>
         </p:txBody>
       </p:sp>
@@ -8836,6 +8911,7 @@
           <a:lstStyle/>
           <a:p>
             <a:pPr algn="ctr"/>
+            <a:endParaRPr/>
           </a:p>
         </p:txBody>
       </p:sp>
@@ -8848,7 +8924,7 @@
         <p:spPr>
           <a:xfrm>
             <a:off x="9386315" y="1051560"/>
-            <a:ext cx="1828800" cy="640080"/>
+            <a:ext cx="1828800" cy="769441"/>
           </a:xfrm>
           <a:prstGeom prst="rect">
             <a:avLst/>
@@ -8863,7 +8939,7 @@
           <a:p>
             <a:pPr algn="ctr"/>
             <a:r>
-              <a:rPr sz="3600" b="1" i="0">
+              <a:rPr sz="4400" b="1" i="0">
                 <a:solidFill>
                   <a:srgbClr val="556580"/>
                 </a:solidFill>
@@ -8883,7 +8959,7 @@
         <p:spPr>
           <a:xfrm>
             <a:off x="9386315" y="1737360"/>
-            <a:ext cx="1828800" cy="347472"/>
+            <a:ext cx="1828800" cy="338554"/>
           </a:xfrm>
           <a:prstGeom prst="rect">
             <a:avLst/>
@@ -8898,7 +8974,7 @@
           <a:p>
             <a:pPr algn="ctr"/>
             <a:r>
-              <a:rPr sz="1200" b="0" i="0">
+              <a:rPr sz="1600" b="0" i="0">
                 <a:solidFill>
                   <a:srgbClr val="556580"/>
                 </a:solidFill>
@@ -8918,7 +8994,7 @@
         <p:spPr>
           <a:xfrm>
             <a:off x="457200" y="2423160"/>
-            <a:ext cx="7315200" cy="365760"/>
+            <a:ext cx="7315200" cy="369332"/>
           </a:xfrm>
           <a:prstGeom prst="rect">
             <a:avLst/>
@@ -8933,7 +9009,7 @@
           <a:p>
             <a:pPr algn="l"/>
             <a:r>
-              <a:rPr sz="1400" b="1" i="0">
+              <a:rPr b="1" i="0">
                 <a:solidFill>
                   <a:srgbClr val="1E2761"/>
                 </a:solidFill>
@@ -8984,6 +9060,7 @@
           <a:lstStyle/>
           <a:p>
             <a:pPr algn="ctr"/>
+            <a:endParaRPr sz="2400"/>
           </a:p>
         </p:txBody>
       </p:sp>
@@ -8996,7 +9073,7 @@
         <p:spPr>
           <a:xfrm>
             <a:off x="411479" y="2953512"/>
-            <a:ext cx="1005839" cy="274320"/>
+            <a:ext cx="1005839" cy="307777"/>
           </a:xfrm>
           <a:prstGeom prst="rect">
             <a:avLst/>
@@ -9011,7 +9088,7 @@
           <a:p>
             <a:pPr algn="l"/>
             <a:r>
-              <a:rPr sz="1100" b="1" i="0">
+              <a:rPr sz="1400" b="1" i="0">
                 <a:solidFill>
                   <a:srgbClr val="FFFFFF"/>
                 </a:solidFill>
@@ -9031,7 +9108,7 @@
         <p:spPr>
           <a:xfrm>
             <a:off x="1508760" y="2953512"/>
-            <a:ext cx="2834640" cy="274320"/>
+            <a:ext cx="2834640" cy="307777"/>
           </a:xfrm>
           <a:prstGeom prst="rect">
             <a:avLst/>
@@ -9046,7 +9123,7 @@
           <a:p>
             <a:pPr algn="l"/>
             <a:r>
-              <a:rPr sz="1100" b="1" i="0">
+              <a:rPr sz="1400" b="1" i="0">
                 <a:solidFill>
                   <a:srgbClr val="FFFFFF"/>
                 </a:solidFill>
@@ -9066,7 +9143,7 @@
         <p:spPr>
           <a:xfrm>
             <a:off x="4434840" y="2953512"/>
-            <a:ext cx="7040880" cy="274320"/>
+            <a:ext cx="7040880" cy="307777"/>
           </a:xfrm>
           <a:prstGeom prst="rect">
             <a:avLst/>
@@ -9081,7 +9158,7 @@
           <a:p>
             <a:pPr algn="l"/>
             <a:r>
-              <a:rPr sz="1100" b="1" i="0">
+              <a:rPr sz="1400" b="1" i="0">
                 <a:solidFill>
                   <a:srgbClr val="FFFFFF"/>
                 </a:solidFill>
@@ -9132,6 +9209,7 @@
           <a:lstStyle/>
           <a:p>
             <a:pPr algn="ctr"/>
+            <a:endParaRPr sz="2400"/>
           </a:p>
         </p:txBody>
       </p:sp>
@@ -9175,6 +9253,7 @@
           <a:lstStyle/>
           <a:p>
             <a:pPr algn="ctr"/>
+            <a:endParaRPr sz="2400"/>
           </a:p>
         </p:txBody>
       </p:sp>
@@ -9187,7 +9266,7 @@
         <p:spPr>
           <a:xfrm>
             <a:off x="411479" y="3355848"/>
-            <a:ext cx="1005840" cy="320040"/>
+            <a:ext cx="1005840" cy="261610"/>
           </a:xfrm>
           <a:prstGeom prst="rect">
             <a:avLst/>
@@ -9202,7 +9281,7 @@
           <a:p>
             <a:pPr algn="l"/>
             <a:r>
-              <a:rPr sz="1000" b="1" i="0">
+              <a:rPr sz="1100" b="1" i="0">
                 <a:solidFill>
                   <a:srgbClr val="1678D4"/>
                 </a:solidFill>
@@ -9222,7 +9301,7 @@
         <p:spPr>
           <a:xfrm>
             <a:off x="1508760" y="3355848"/>
-            <a:ext cx="2834640" cy="320040"/>
+            <a:ext cx="2834640" cy="261610"/>
           </a:xfrm>
           <a:prstGeom prst="rect">
             <a:avLst/>
@@ -9237,7 +9316,7 @@
           <a:p>
             <a:pPr algn="l"/>
             <a:r>
-              <a:rPr sz="1000" b="1" i="0">
+              <a:rPr sz="1100" b="1" i="0">
                 <a:solidFill>
                   <a:srgbClr val="1E2761"/>
                 </a:solidFill>
@@ -9257,7 +9336,7 @@
         <p:spPr>
           <a:xfrm>
             <a:off x="4434840" y="3310127"/>
-            <a:ext cx="6949440" cy="384048"/>
+            <a:ext cx="6949440" cy="253916"/>
           </a:xfrm>
           <a:prstGeom prst="rect">
             <a:avLst/>
@@ -9272,7 +9351,7 @@
           <a:p>
             <a:pPr algn="l"/>
             <a:r>
-              <a:rPr sz="950" b="0" i="0">
+              <a:rPr sz="1050" b="0" i="0">
                 <a:solidFill>
                   <a:srgbClr val="556580"/>
                 </a:solidFill>
@@ -9323,6 +9402,7 @@
           <a:lstStyle/>
           <a:p>
             <a:pPr algn="ctr"/>
+            <a:endParaRPr sz="2400"/>
           </a:p>
         </p:txBody>
       </p:sp>
@@ -9366,6 +9446,7 @@
           <a:lstStyle/>
           <a:p>
             <a:pPr algn="ctr"/>
+            <a:endParaRPr sz="2400"/>
           </a:p>
         </p:txBody>
       </p:sp>
@@ -9378,7 +9459,7 @@
         <p:spPr>
           <a:xfrm>
             <a:off x="411479" y="3849623"/>
-            <a:ext cx="1005840" cy="320040"/>
+            <a:ext cx="1005840" cy="261610"/>
           </a:xfrm>
           <a:prstGeom prst="rect">
             <a:avLst/>
@@ -9393,7 +9474,7 @@
           <a:p>
             <a:pPr algn="l"/>
             <a:r>
-              <a:rPr sz="1000" b="1" i="0">
+              <a:rPr sz="1100" b="1" i="0">
                 <a:solidFill>
                   <a:srgbClr val="1678D4"/>
                 </a:solidFill>
@@ -9413,7 +9494,7 @@
         <p:spPr>
           <a:xfrm>
             <a:off x="1508760" y="3849623"/>
-            <a:ext cx="2834640" cy="320040"/>
+            <a:ext cx="2834640" cy="261610"/>
           </a:xfrm>
           <a:prstGeom prst="rect">
             <a:avLst/>
@@ -9428,7 +9509,7 @@
           <a:p>
             <a:pPr algn="l"/>
             <a:r>
-              <a:rPr sz="1000" b="1" i="0">
+              <a:rPr sz="1100" b="1" i="0">
                 <a:solidFill>
                   <a:srgbClr val="1E2761"/>
                 </a:solidFill>
@@ -9448,7 +9529,7 @@
         <p:spPr>
           <a:xfrm>
             <a:off x="4434840" y="3803903"/>
-            <a:ext cx="6949440" cy="384048"/>
+            <a:ext cx="6949440" cy="253916"/>
           </a:xfrm>
           <a:prstGeom prst="rect">
             <a:avLst/>
@@ -9463,7 +9544,7 @@
           <a:p>
             <a:pPr algn="l"/>
             <a:r>
-              <a:rPr sz="950" b="0" i="0">
+              <a:rPr sz="1050" b="0" i="0">
                 <a:solidFill>
                   <a:srgbClr val="556580"/>
                 </a:solidFill>
@@ -9514,6 +9595,7 @@
           <a:lstStyle/>
           <a:p>
             <a:pPr algn="ctr"/>
+            <a:endParaRPr sz="2400"/>
           </a:p>
         </p:txBody>
       </p:sp>
@@ -9557,6 +9639,7 @@
           <a:lstStyle/>
           <a:p>
             <a:pPr algn="ctr"/>
+            <a:endParaRPr sz="2400"/>
           </a:p>
         </p:txBody>
       </p:sp>
@@ -9569,7 +9652,7 @@
         <p:spPr>
           <a:xfrm>
             <a:off x="411479" y="4343399"/>
-            <a:ext cx="1005840" cy="320040"/>
+            <a:ext cx="1005840" cy="261610"/>
           </a:xfrm>
           <a:prstGeom prst="rect">
             <a:avLst/>
@@ -9584,7 +9667,7 @@
           <a:p>
             <a:pPr algn="l"/>
             <a:r>
-              <a:rPr sz="1000" b="1" i="0">
+              <a:rPr sz="1100" b="1" i="0">
                 <a:solidFill>
                   <a:srgbClr val="556580"/>
                 </a:solidFill>
@@ -9604,7 +9687,7 @@
         <p:spPr>
           <a:xfrm>
             <a:off x="1508760" y="4343399"/>
-            <a:ext cx="2834640" cy="320040"/>
+            <a:ext cx="2834640" cy="261610"/>
           </a:xfrm>
           <a:prstGeom prst="rect">
             <a:avLst/>
@@ -9619,7 +9702,7 @@
           <a:p>
             <a:pPr algn="l"/>
             <a:r>
-              <a:rPr sz="1000" b="1" i="0">
+              <a:rPr sz="1100" b="1" i="0">
                 <a:solidFill>
                   <a:srgbClr val="1E2761"/>
                 </a:solidFill>
@@ -9639,7 +9722,7 @@
         <p:spPr>
           <a:xfrm>
             <a:off x="4434840" y="4297679"/>
-            <a:ext cx="6949440" cy="384048"/>
+            <a:ext cx="6949440" cy="253916"/>
           </a:xfrm>
           <a:prstGeom prst="rect">
             <a:avLst/>
@@ -9654,7 +9737,7 @@
           <a:p>
             <a:pPr algn="l"/>
             <a:r>
-              <a:rPr sz="950" b="0" i="0">
+              <a:rPr sz="1050" b="0" i="0">
                 <a:solidFill>
                   <a:srgbClr val="556580"/>
                 </a:solidFill>
@@ -9674,7 +9757,7 @@
         <p:spPr>
           <a:xfrm>
             <a:off x="320040" y="4928616"/>
-            <a:ext cx="11521440" cy="365760"/>
+            <a:ext cx="11521440" cy="338554"/>
           </a:xfrm>
           <a:prstGeom prst="rect">
             <a:avLst/>
@@ -9689,7 +9772,7 @@
           <a:p>
             <a:pPr algn="ctr"/>
             <a:r>
-              <a:rPr sz="1200" b="1" i="0">
+              <a:rPr sz="1600" b="1" i="0">
                 <a:solidFill>
                   <a:srgbClr val="16A34A"/>
                 </a:solidFill>
@@ -9709,7 +9792,7 @@
 </file>
 
 <file path=ppt/slides/slide6.xml><?xml version="1.0" encoding="utf-8"?>
-<p:sld xmlns:a="http://schemas.openxmlformats.org/drawingml/2006/main" xmlns:p="http://schemas.openxmlformats.org/presentationml/2006/main" xmlns:r="http://schemas.openxmlformats.org/officeDocument/2006/relationships">
+<p:sld xmlns:a="http://schemas.openxmlformats.org/drawingml/2006/main" xmlns:r="http://schemas.openxmlformats.org/officeDocument/2006/relationships" xmlns:p="http://schemas.openxmlformats.org/presentationml/2006/main">
   <p:cSld>
     <p:bg>
       <p:bgPr>
@@ -9725,7 +9808,14 @@
         <p:cNvGrpSpPr/>
         <p:nvPr/>
       </p:nvGrpSpPr>
-      <p:grpSpPr/>
+      <p:grpSpPr>
+        <a:xfrm>
+          <a:off x="0" y="0"/>
+          <a:ext cx="0" cy="0"/>
+          <a:chOff x="0" y="0"/>
+          <a:chExt cx="0" cy="0"/>
+        </a:xfrm>
+      </p:grpSpPr>
       <p:sp>
         <p:nvSpPr>
           <p:cNvPr id="2" name="Rectangle 1"/>
@@ -9766,6 +9856,7 @@
           <a:lstStyle/>
           <a:p>
             <a:pPr algn="ctr"/>
+            <a:endParaRPr/>
           </a:p>
         </p:txBody>
       </p:sp>
@@ -9844,6 +9935,7 @@
           <a:lstStyle/>
           <a:p>
             <a:pPr algn="ctr"/>
+            <a:endParaRPr/>
           </a:p>
         </p:txBody>
       </p:sp>
@@ -9922,6 +10014,7 @@
           <a:lstStyle/>
           <a:p>
             <a:pPr algn="ctr"/>
+            <a:endParaRPr sz="2400"/>
           </a:p>
         </p:txBody>
       </p:sp>
@@ -9965,6 +10058,7 @@
           <a:lstStyle/>
           <a:p>
             <a:pPr algn="ctr"/>
+            <a:endParaRPr sz="2400"/>
           </a:p>
         </p:txBody>
       </p:sp>
@@ -10008,6 +10102,7 @@
           <a:lstStyle/>
           <a:p>
             <a:pPr algn="ctr"/>
+            <a:endParaRPr sz="2400"/>
           </a:p>
         </p:txBody>
       </p:sp>
@@ -10020,7 +10115,7 @@
         <p:spPr>
           <a:xfrm>
             <a:off x="502920" y="1554480"/>
-            <a:ext cx="5166360" cy="347472"/>
+            <a:ext cx="5166360" cy="338554"/>
           </a:xfrm>
           <a:prstGeom prst="rect">
             <a:avLst/>
@@ -10035,7 +10130,7 @@
           <a:p>
             <a:pPr algn="l"/>
             <a:r>
-              <a:rPr sz="1200" b="1" i="0">
+              <a:rPr sz="1600" b="1" i="0">
                 <a:solidFill>
                   <a:srgbClr val="1E2761"/>
                 </a:solidFill>
@@ -10055,7 +10150,7 @@
         <p:spPr>
           <a:xfrm>
             <a:off x="502920" y="1920240"/>
-            <a:ext cx="5166360" cy="914400"/>
+            <a:ext cx="5166360" cy="430887"/>
           </a:xfrm>
           <a:prstGeom prst="rect">
             <a:avLst/>
@@ -10070,7 +10165,7 @@
           <a:p>
             <a:pPr algn="l"/>
             <a:r>
-              <a:rPr sz="1000" b="0" i="0">
+              <a:rPr sz="1100" b="0" i="0" dirty="0">
                 <a:solidFill>
                   <a:srgbClr val="556580"/>
                 </a:solidFill>
@@ -10121,6 +10216,7 @@
           <a:lstStyle/>
           <a:p>
             <a:pPr algn="ctr"/>
+            <a:endParaRPr sz="2400"/>
           </a:p>
         </p:txBody>
       </p:sp>
@@ -10164,6 +10260,7 @@
           <a:lstStyle/>
           <a:p>
             <a:pPr algn="ctr"/>
+            <a:endParaRPr sz="2400"/>
           </a:p>
         </p:txBody>
       </p:sp>
@@ -10207,6 +10304,7 @@
           <a:lstStyle/>
           <a:p>
             <a:pPr algn="ctr"/>
+            <a:endParaRPr sz="2400"/>
           </a:p>
         </p:txBody>
       </p:sp>
@@ -10219,7 +10317,7 @@
         <p:spPr>
           <a:xfrm>
             <a:off x="502920" y="3063240"/>
-            <a:ext cx="5166360" cy="347472"/>
+            <a:ext cx="5166360" cy="338554"/>
           </a:xfrm>
           <a:prstGeom prst="rect">
             <a:avLst/>
@@ -10234,7 +10332,7 @@
           <a:p>
             <a:pPr algn="l"/>
             <a:r>
-              <a:rPr sz="1200" b="1" i="0">
+              <a:rPr sz="1600" b="1" i="0" dirty="0">
                 <a:solidFill>
                   <a:srgbClr val="1E2761"/>
                 </a:solidFill>
@@ -10254,7 +10352,7 @@
         <p:spPr>
           <a:xfrm>
             <a:off x="502920" y="3429000"/>
-            <a:ext cx="5166360" cy="914400"/>
+            <a:ext cx="5166360" cy="430887"/>
           </a:xfrm>
           <a:prstGeom prst="rect">
             <a:avLst/>
@@ -10269,13 +10367,49 @@
           <a:p>
             <a:pPr algn="l"/>
             <a:r>
-              <a:rPr sz="1000" b="0" i="0">
+              <a:rPr sz="1100" b="0" i="0" dirty="0">
                 <a:solidFill>
                   <a:srgbClr val="556580"/>
                 </a:solidFill>
                 <a:latin typeface="Calibri"/>
               </a:rPr>
-              <a:t>Strict SameSite=Strict cookies and HTTPS-only enforcement created friction during local development, requiring debug-mode exceptions.</a:t>
+              <a:t>Strict </a:t>
+            </a:r>
+            <a:r>
+              <a:rPr sz="1100" b="0" i="0" dirty="0" err="1">
+                <a:solidFill>
+                  <a:srgbClr val="556580"/>
+                </a:solidFill>
+                <a:latin typeface="Calibri"/>
+              </a:rPr>
+              <a:t>SameSite</a:t>
+            </a:r>
+            <a:r>
+              <a:rPr sz="1100" b="0" i="0" dirty="0">
+                <a:solidFill>
+                  <a:srgbClr val="556580"/>
+                </a:solidFill>
+                <a:latin typeface="Calibri"/>
+              </a:rPr>
+              <a:t>=Strict cookies and HTTPS-only enforcement </a:t>
+            </a:r>
+            <a:r>
+              <a:rPr lang="en-US" sz="1100" b="0" i="0" dirty="0">
+                <a:solidFill>
+                  <a:srgbClr val="556580"/>
+                </a:solidFill>
+                <a:latin typeface="Calibri"/>
+              </a:rPr>
+              <a:t>was tricky to work with during </a:t>
+            </a:r>
+            <a:r>
+              <a:rPr sz="1100" b="0" i="0" dirty="0">
+                <a:solidFill>
+                  <a:srgbClr val="556580"/>
+                </a:solidFill>
+                <a:latin typeface="Calibri"/>
+              </a:rPr>
+              <a:t>development, requiring debug-mode exceptions.</a:t>
             </a:r>
           </a:p>
         </p:txBody>
@@ -10320,6 +10454,7 @@
           <a:lstStyle/>
           <a:p>
             <a:pPr algn="ctr"/>
+            <a:endParaRPr sz="2400"/>
           </a:p>
         </p:txBody>
       </p:sp>
@@ -10363,6 +10498,7 @@
           <a:lstStyle/>
           <a:p>
             <a:pPr algn="ctr"/>
+            <a:endParaRPr sz="2400"/>
           </a:p>
         </p:txBody>
       </p:sp>
@@ -10406,6 +10542,7 @@
           <a:lstStyle/>
           <a:p>
             <a:pPr algn="ctr"/>
+            <a:endParaRPr sz="2400"/>
           </a:p>
         </p:txBody>
       </p:sp>
@@ -10418,7 +10555,7 @@
         <p:spPr>
           <a:xfrm>
             <a:off x="502920" y="4572000"/>
-            <a:ext cx="5166360" cy="347472"/>
+            <a:ext cx="5166360" cy="338554"/>
           </a:xfrm>
           <a:prstGeom prst="rect">
             <a:avLst/>
@@ -10433,7 +10570,7 @@
           <a:p>
             <a:pPr algn="l"/>
             <a:r>
-              <a:rPr sz="1200" b="1" i="0">
+              <a:rPr sz="1600" b="1" i="0">
                 <a:solidFill>
                   <a:srgbClr val="1E2761"/>
                 </a:solidFill>
@@ -10453,7 +10590,7 @@
         <p:spPr>
           <a:xfrm>
             <a:off x="502920" y="4937760"/>
-            <a:ext cx="5166360" cy="914400"/>
+            <a:ext cx="5166360" cy="430887"/>
           </a:xfrm>
           <a:prstGeom prst="rect">
             <a:avLst/>
@@ -10468,13 +10605,31 @@
           <a:p>
             <a:pPr algn="l"/>
             <a:r>
-              <a:rPr sz="1000" b="0" i="0">
+              <a:rPr sz="1100" b="0" i="0" dirty="0">
                 <a:solidFill>
                   <a:srgbClr val="556580"/>
                 </a:solidFill>
                 <a:latin typeface="Calibri"/>
               </a:rPr>
-              <a:t>Discovered that byte-overwriting files does not guarantee erasure on SSDs — shifted reliance to encryption-key management as the primary deletion defense.</a:t>
+              <a:t>Discovered that byte-overwriting files does not guarantee erasure on SSDs</a:t>
+            </a:r>
+            <a:r>
+              <a:rPr lang="en-US" sz="1100" b="0" i="0" dirty="0">
+                <a:solidFill>
+                  <a:srgbClr val="556580"/>
+                </a:solidFill>
+                <a:latin typeface="Calibri"/>
+              </a:rPr>
+              <a:t>, so we</a:t>
+            </a:r>
+            <a:r>
+              <a:rPr sz="1100" b="0" i="0" dirty="0">
+                <a:solidFill>
+                  <a:srgbClr val="556580"/>
+                </a:solidFill>
+                <a:latin typeface="Calibri"/>
+              </a:rPr>
+              <a:t> shifted reliance to encryption-key management as the primary deletion defense.</a:t>
             </a:r>
           </a:p>
         </p:txBody>
@@ -10519,6 +10674,7 @@
           <a:lstStyle/>
           <a:p>
             <a:pPr algn="ctr"/>
+            <a:endParaRPr/>
           </a:p>
         </p:txBody>
       </p:sp>
@@ -10597,6 +10753,7 @@
           <a:lstStyle/>
           <a:p>
             <a:pPr algn="ctr"/>
+            <a:endParaRPr sz="2400"/>
           </a:p>
         </p:txBody>
       </p:sp>
@@ -10640,6 +10797,7 @@
           <a:lstStyle/>
           <a:p>
             <a:pPr algn="ctr"/>
+            <a:endParaRPr sz="2400"/>
           </a:p>
         </p:txBody>
       </p:sp>
@@ -10683,6 +10841,7 @@
           <a:lstStyle/>
           <a:p>
             <a:pPr algn="ctr"/>
+            <a:endParaRPr sz="2400"/>
           </a:p>
         </p:txBody>
       </p:sp>
@@ -10695,7 +10854,7 @@
         <p:spPr>
           <a:xfrm>
             <a:off x="6583680" y="1554480"/>
-            <a:ext cx="5166360" cy="347472"/>
+            <a:ext cx="5166360" cy="338554"/>
           </a:xfrm>
           <a:prstGeom prst="rect">
             <a:avLst/>
@@ -10710,14 +10869,20 @@
           <a:p>
             <a:pPr algn="l"/>
             <a:r>
-              <a:rPr sz="1200" b="1" i="0">
+              <a:rPr lang="en-US" sz="1600" b="1" dirty="0">
                 <a:solidFill>
                   <a:srgbClr val="1E2761"/>
                 </a:solidFill>
                 <a:latin typeface="Calibri"/>
               </a:rPr>
-              <a:t>Defence in depth matters</a:t>
-            </a:r>
+              <a:t>Multiple layers of defense is important</a:t>
+            </a:r>
+            <a:endParaRPr sz="1600" b="1" i="0" dirty="0">
+              <a:solidFill>
+                <a:srgbClr val="1E2761"/>
+              </a:solidFill>
+              <a:latin typeface="Calibri"/>
+            </a:endParaRPr>
           </a:p>
         </p:txBody>
       </p:sp>
@@ -10730,7 +10895,7 @@
         <p:spPr>
           <a:xfrm>
             <a:off x="6583680" y="1920240"/>
-            <a:ext cx="5166360" cy="914400"/>
+            <a:ext cx="5166360" cy="430887"/>
           </a:xfrm>
           <a:prstGeom prst="rect">
             <a:avLst/>
@@ -10745,14 +10910,29 @@
           <a:p>
             <a:pPr algn="l"/>
             <a:r>
-              <a:rPr sz="1000" b="0" i="0">
+              <a:rPr sz="1100" b="0" i="0" dirty="0">
                 <a:solidFill>
                   <a:srgbClr val="556580"/>
                 </a:solidFill>
                 <a:latin typeface="Calibri"/>
               </a:rPr>
-              <a:t>No single control is enough. Combining RBAC, encryption, validation, and logging means an attacker must defeat multiple independent layers.</a:t>
-            </a:r>
+              <a:t>Combining RBAC, encryption, validation, and logging means an attacker must defeat multiple independent layers</a:t>
+            </a:r>
+            <a:r>
+              <a:rPr lang="en-US" sz="1100" b="0" i="0" dirty="0">
+                <a:solidFill>
+                  <a:srgbClr val="556580"/>
+                </a:solidFill>
+                <a:latin typeface="Calibri"/>
+              </a:rPr>
+              <a:t> instead of just one.</a:t>
+            </a:r>
+            <a:endParaRPr sz="1100" b="0" i="0" dirty="0">
+              <a:solidFill>
+                <a:srgbClr val="556580"/>
+              </a:solidFill>
+              <a:latin typeface="Calibri"/>
+            </a:endParaRPr>
           </a:p>
         </p:txBody>
       </p:sp>
@@ -10796,6 +10976,7 @@
           <a:lstStyle/>
           <a:p>
             <a:pPr algn="ctr"/>
+            <a:endParaRPr sz="2400"/>
           </a:p>
         </p:txBody>
       </p:sp>
@@ -10839,6 +11020,7 @@
           <a:lstStyle/>
           <a:p>
             <a:pPr algn="ctr"/>
+            <a:endParaRPr sz="2400"/>
           </a:p>
         </p:txBody>
       </p:sp>
@@ -10882,6 +11064,7 @@
           <a:lstStyle/>
           <a:p>
             <a:pPr algn="ctr"/>
+            <a:endParaRPr sz="2400"/>
           </a:p>
         </p:txBody>
       </p:sp>
@@ -10894,7 +11077,7 @@
         <p:spPr>
           <a:xfrm>
             <a:off x="6583680" y="3063240"/>
-            <a:ext cx="5166360" cy="347472"/>
+            <a:ext cx="5166360" cy="338554"/>
           </a:xfrm>
           <a:prstGeom prst="rect">
             <a:avLst/>
@@ -10909,14 +11092,29 @@
           <a:p>
             <a:pPr algn="l"/>
             <a:r>
-              <a:rPr sz="1200" b="1" i="0">
+              <a:rPr lang="en-US" sz="1600" b="1" i="0" dirty="0">
                 <a:solidFill>
                   <a:srgbClr val="1E2761"/>
                 </a:solidFill>
                 <a:latin typeface="Calibri"/>
               </a:rPr>
-              <a:t>Test the negative cases</a:t>
-            </a:r>
+              <a:t>Include a variet</a:t>
+            </a:r>
+            <a:r>
+              <a:rPr lang="en-US" sz="1600" b="1" dirty="0">
+                <a:solidFill>
+                  <a:srgbClr val="1E2761"/>
+                </a:solidFill>
+                <a:latin typeface="Calibri"/>
+              </a:rPr>
+              <a:t>y of test cases</a:t>
+            </a:r>
+            <a:endParaRPr sz="1600" b="1" i="0" dirty="0">
+              <a:solidFill>
+                <a:srgbClr val="1E2761"/>
+              </a:solidFill>
+              <a:latin typeface="Calibri"/>
+            </a:endParaRPr>
           </a:p>
         </p:txBody>
       </p:sp>
@@ -10929,7 +11127,7 @@
         <p:spPr>
           <a:xfrm>
             <a:off x="6583680" y="3429000"/>
-            <a:ext cx="5166360" cy="914400"/>
+            <a:ext cx="5166360" cy="261610"/>
           </a:xfrm>
           <a:prstGeom prst="rect">
             <a:avLst/>
@@ -10944,13 +11142,85 @@
           <a:p>
             <a:pPr algn="l"/>
             <a:r>
-              <a:rPr sz="1000" b="0" i="0">
+              <a:rPr lang="en-US" sz="1100" dirty="0">
                 <a:solidFill>
                   <a:srgbClr val="556580"/>
                 </a:solidFill>
                 <a:latin typeface="Calibri"/>
               </a:rPr>
-              <a:t>Security testing is mostly about proving things don't work when they shouldn't — access denied, lockout enforced, bad input rejected.</a:t>
+              <a:t>Test </a:t>
+            </a:r>
+            <a:r>
+              <a:rPr lang="en-US" sz="1100" b="0" i="0" dirty="0">
+                <a:solidFill>
+                  <a:srgbClr val="556580"/>
+                </a:solidFill>
+                <a:latin typeface="Calibri"/>
+              </a:rPr>
+              <a:t>access control</a:t>
+            </a:r>
+            <a:r>
+              <a:rPr sz="1100" b="0" i="0" dirty="0">
+                <a:solidFill>
+                  <a:srgbClr val="556580"/>
+                </a:solidFill>
+                <a:latin typeface="Calibri"/>
+              </a:rPr>
+              <a:t>,</a:t>
+            </a:r>
+            <a:r>
+              <a:rPr lang="en-US" sz="1100" dirty="0">
+                <a:solidFill>
+                  <a:srgbClr val="556580"/>
+                </a:solidFill>
+                <a:latin typeface="Calibri"/>
+              </a:rPr>
+              <a:t> if lockout was enforced</a:t>
+            </a:r>
+            <a:r>
+              <a:rPr sz="1100" b="0" i="0" dirty="0">
+                <a:solidFill>
+                  <a:srgbClr val="556580"/>
+                </a:solidFill>
+                <a:latin typeface="Calibri"/>
+              </a:rPr>
+              <a:t>, </a:t>
+            </a:r>
+            <a:r>
+              <a:rPr lang="en-US" sz="1100" dirty="0">
+                <a:solidFill>
+                  <a:srgbClr val="556580"/>
+                </a:solidFill>
+                <a:latin typeface="Calibri"/>
+              </a:rPr>
+              <a:t>and if a </a:t>
+            </a:r>
+            <a:r>
+              <a:rPr sz="1100" b="0" i="0" dirty="0">
+                <a:solidFill>
+                  <a:srgbClr val="556580"/>
+                </a:solidFill>
+                <a:latin typeface="Calibri"/>
+              </a:rPr>
+              <a:t>bad input </a:t>
+            </a:r>
+            <a:r>
+              <a:rPr lang="en-US" sz="1100" b="0" i="0" dirty="0">
+                <a:solidFill>
+                  <a:srgbClr val="556580"/>
+                </a:solidFill>
+                <a:latin typeface="Calibri"/>
+              </a:rPr>
+              <a:t>was </a:t>
+            </a:r>
+            <a:r>
+              <a:rPr sz="1100" b="0" i="0" dirty="0">
+                <a:solidFill>
+                  <a:srgbClr val="556580"/>
+                </a:solidFill>
+                <a:latin typeface="Calibri"/>
+              </a:rPr>
+              <a:t>rejected.</a:t>
             </a:r>
           </a:p>
         </p:txBody>
@@ -10995,6 +11265,7 @@
           <a:lstStyle/>
           <a:p>
             <a:pPr algn="ctr"/>
+            <a:endParaRPr sz="2400"/>
           </a:p>
         </p:txBody>
       </p:sp>
@@ -11038,6 +11309,7 @@
           <a:lstStyle/>
           <a:p>
             <a:pPr algn="ctr"/>
+            <a:endParaRPr sz="2400"/>
           </a:p>
         </p:txBody>
       </p:sp>
@@ -11081,6 +11353,7 @@
           <a:lstStyle/>
           <a:p>
             <a:pPr algn="ctr"/>
+            <a:endParaRPr sz="2400"/>
           </a:p>
         </p:txBody>
       </p:sp>
@@ -11093,7 +11366,7 @@
         <p:spPr>
           <a:xfrm>
             <a:off x="6583680" y="4572000"/>
-            <a:ext cx="5166360" cy="347472"/>
+            <a:ext cx="5166360" cy="338554"/>
           </a:xfrm>
           <a:prstGeom prst="rect">
             <a:avLst/>
@@ -11108,14 +11381,20 @@
           <a:p>
             <a:pPr algn="l"/>
             <a:r>
-              <a:rPr sz="1200" b="1" i="0">
+              <a:rPr lang="en-US" sz="1600" b="1" i="0" dirty="0">
                 <a:solidFill>
                   <a:srgbClr val="1E2761"/>
                 </a:solidFill>
                 <a:latin typeface="Calibri"/>
               </a:rPr>
-              <a:t>Secrets in version control are a real risk</a:t>
-            </a:r>
+              <a:t>Keep secrets out of version control</a:t>
+            </a:r>
+            <a:endParaRPr sz="1600" b="1" i="0" dirty="0">
+              <a:solidFill>
+                <a:srgbClr val="1E2761"/>
+              </a:solidFill>
+              <a:latin typeface="Calibri"/>
+            </a:endParaRPr>
           </a:p>
         </p:txBody>
       </p:sp>
@@ -11128,7 +11407,7 @@
         <p:spPr>
           <a:xfrm>
             <a:off x="6583680" y="4937760"/>
-            <a:ext cx="5166360" cy="914400"/>
+            <a:ext cx="5166360" cy="430887"/>
           </a:xfrm>
           <a:prstGeom prst="rect">
             <a:avLst/>
@@ -11143,14 +11422,20 @@
           <a:p>
             <a:pPr algn="l"/>
             <a:r>
-              <a:rPr sz="1000" b="0" i="0">
+              <a:rPr lang="en-US" sz="1100" b="0" i="0" dirty="0">
                 <a:solidFill>
                   <a:srgbClr val="556580"/>
                 </a:solidFill>
                 <a:latin typeface="Calibri"/>
               </a:rPr>
-              <a:t>Keeping encryption keys and TLS certs in git — even for convenience — is a practice that must be avoided in any non-demo deployment.</a:t>
-            </a:r>
+              <a:t>For deployment, we kept encryption keys and TLS certs in the repository, but that is a huge risk for real development.</a:t>
+            </a:r>
+            <a:endParaRPr sz="1100" b="0" i="0" dirty="0">
+              <a:solidFill>
+                <a:srgbClr val="556580"/>
+              </a:solidFill>
+              <a:latin typeface="Calibri"/>
+            </a:endParaRPr>
           </a:p>
         </p:txBody>
       </p:sp>
@@ -11163,7 +11448,7 @@
 </file>
 
 <file path=ppt/slides/slide7.xml><?xml version="1.0" encoding="utf-8"?>
-<p:sld xmlns:a="http://schemas.openxmlformats.org/drawingml/2006/main" xmlns:p="http://schemas.openxmlformats.org/presentationml/2006/main" xmlns:r="http://schemas.openxmlformats.org/officeDocument/2006/relationships">
+<p:sld xmlns:a="http://schemas.openxmlformats.org/drawingml/2006/main" xmlns:r="http://schemas.openxmlformats.org/officeDocument/2006/relationships" xmlns:p="http://schemas.openxmlformats.org/presentationml/2006/main">
   <p:cSld>
     <p:bg>
       <p:bgPr>
@@ -11179,7 +11464,14 @@
         <p:cNvGrpSpPr/>
         <p:nvPr/>
       </p:nvGrpSpPr>
-      <p:grpSpPr/>
+      <p:grpSpPr>
+        <a:xfrm>
+          <a:off x="0" y="0"/>
+          <a:ext cx="0" cy="0"/>
+          <a:chOff x="0" y="0"/>
+          <a:chExt cx="0" cy="0"/>
+        </a:xfrm>
+      </p:grpSpPr>
       <p:sp>
         <p:nvSpPr>
           <p:cNvPr id="2" name="Rectangle 1"/>
@@ -11220,6 +11512,7 @@
           <a:lstStyle/>
           <a:p>
             <a:pPr algn="ctr"/>
+            <a:endParaRPr/>
           </a:p>
         </p:txBody>
       </p:sp>
@@ -11263,6 +11556,7 @@
           <a:lstStyle/>
           <a:p>
             <a:pPr algn="ctr"/>
+            <a:endParaRPr/>
           </a:p>
         </p:txBody>
       </p:sp>
@@ -11310,7 +11604,7 @@
         <p:spPr>
           <a:xfrm>
             <a:off x="914400" y="2377440"/>
-            <a:ext cx="10332720" cy="2011680"/>
+            <a:ext cx="10332720" cy="1169551"/>
           </a:xfrm>
           <a:prstGeom prst="rect">
             <a:avLst/>
@@ -11325,13 +11619,58 @@
           <a:p>
             <a:pPr algn="ctr"/>
             <a:r>
-              <a:rPr sz="1400" b="0" i="0">
+              <a:rPr sz="1400" b="0" i="0" dirty="0">
                 <a:solidFill>
                   <a:srgbClr val="FFFFFF"/>
                 </a:solidFill>
                 <a:latin typeface="Calibri"/>
               </a:rPr>
-              <a:t>We built a secure document sharing system that demonstrates production-grade security practices across every layer — from bcrypt password hashing and Fernet encryption at rest, to strict RBAC, input validation, session security, and structured audit logging.
+              <a:t>We built a secure document sharing system that demonstrates production-grade security practices across every layer</a:t>
+            </a:r>
+            <a:r>
+              <a:rPr lang="en-US" sz="1400" b="0" i="0" dirty="0">
+                <a:solidFill>
+                  <a:srgbClr val="FFFFFF"/>
+                </a:solidFill>
+                <a:latin typeface="Calibri"/>
+              </a:rPr>
+              <a:t>.</a:t>
+            </a:r>
+            <a:r>
+              <a:rPr sz="1400" b="0" i="0" dirty="0">
+                <a:solidFill>
+                  <a:srgbClr val="FFFFFF"/>
+                </a:solidFill>
+                <a:latin typeface="Calibri"/>
+              </a:rPr>
+              <a:t> </a:t>
+            </a:r>
+            <a:r>
+              <a:rPr lang="en-US" sz="1400" b="0" i="0" dirty="0">
+                <a:solidFill>
+                  <a:srgbClr val="FFFFFF"/>
+                </a:solidFill>
+                <a:latin typeface="Calibri"/>
+              </a:rPr>
+              <a:t>It includes </a:t>
+            </a:r>
+            <a:r>
+              <a:rPr sz="1400" b="0" i="0" dirty="0" err="1">
+                <a:solidFill>
+                  <a:srgbClr val="FFFFFF"/>
+                </a:solidFill>
+                <a:latin typeface="Calibri"/>
+              </a:rPr>
+              <a:t>bcrypt</a:t>
+            </a:r>
+            <a:r>
+              <a:rPr sz="1400" b="0" i="0" dirty="0">
+                <a:solidFill>
+                  <a:srgbClr val="FFFFFF"/>
+                </a:solidFill>
+                <a:latin typeface="Calibri"/>
+              </a:rPr>
+              <a:t> password hashing and Fernet encryption at rest, to strict RBAC, input validation, session security, and structured audit logging.
 Penetration testing confirmed no critical, high, or medium vulnerabilities. The two low-severity findings identified are known and have clear remediation paths.</a:t>
             </a:r>
           </a:p>
@@ -11377,6 +11716,7 @@
           <a:lstStyle/>
           <a:p>
             <a:pPr algn="ctr"/>
+            <a:endParaRPr/>
           </a:p>
         </p:txBody>
       </p:sp>
@@ -11389,7 +11729,7 @@
         <p:spPr>
           <a:xfrm>
             <a:off x="2743200" y="4754880"/>
-            <a:ext cx="6858000" cy="347472"/>
+            <a:ext cx="6858000" cy="276999"/>
           </a:xfrm>
           <a:prstGeom prst="rect">
             <a:avLst/>
@@ -11404,14 +11744,65 @@
           <a:p>
             <a:pPr algn="l"/>
             <a:r>
-              <a:rPr sz="1200" b="0" i="0">
+              <a:rPr sz="1200" b="0" i="0" dirty="0">
                 <a:solidFill>
                   <a:srgbClr val="CADCFC"/>
                 </a:solidFill>
                 <a:latin typeface="Calibri"/>
               </a:rPr>
-              <a:t>Security is built in layers — no single control is sufficient</a:t>
-            </a:r>
+              <a:t>Security is built in layers</a:t>
+            </a:r>
+            <a:r>
+              <a:rPr lang="en-US" sz="1200" b="0" i="0" dirty="0">
+                <a:solidFill>
+                  <a:srgbClr val="CADCFC"/>
+                </a:solidFill>
+                <a:latin typeface="Calibri"/>
+              </a:rPr>
+              <a:t>, </a:t>
+            </a:r>
+            <a:r>
+              <a:rPr sz="1200" b="0" i="0" dirty="0">
+                <a:solidFill>
+                  <a:srgbClr val="CADCFC"/>
+                </a:solidFill>
+                <a:latin typeface="Calibri"/>
+              </a:rPr>
+              <a:t>no single </a:t>
+            </a:r>
+            <a:r>
+              <a:rPr lang="en-US" sz="1200" b="0" i="0" dirty="0">
+                <a:solidFill>
+                  <a:srgbClr val="CADCFC"/>
+                </a:solidFill>
+                <a:latin typeface="Calibri"/>
+              </a:rPr>
+              <a:t>protection </a:t>
+            </a:r>
+            <a:r>
+              <a:rPr sz="1200" b="0" i="0" dirty="0">
+                <a:solidFill>
+                  <a:srgbClr val="CADCFC"/>
+                </a:solidFill>
+                <a:latin typeface="Calibri"/>
+              </a:rPr>
+              <a:t>is sufficient</a:t>
+            </a:r>
+            <a:r>
+              <a:rPr lang="en-US" sz="1200" b="0" i="0" dirty="0">
+                <a:solidFill>
+                  <a:srgbClr val="CADCFC"/>
+                </a:solidFill>
+                <a:latin typeface="Calibri"/>
+              </a:rPr>
+              <a:t>, you need multiple</a:t>
+            </a:r>
+            <a:endParaRPr sz="1200" b="0" i="0" dirty="0">
+              <a:solidFill>
+                <a:srgbClr val="CADCFC"/>
+              </a:solidFill>
+              <a:latin typeface="Calibri"/>
+            </a:endParaRPr>
           </a:p>
         </p:txBody>
       </p:sp>
@@ -11455,6 +11846,7 @@
           <a:lstStyle/>
           <a:p>
             <a:pPr algn="ctr"/>
+            <a:endParaRPr/>
           </a:p>
         </p:txBody>
       </p:sp>
@@ -11482,7 +11874,7 @@
           <a:p>
             <a:pPr algn="l"/>
             <a:r>
-              <a:rPr sz="1200" b="0" i="0">
+              <a:rPr sz="1200" b="0" i="0" dirty="0">
                 <a:solidFill>
                   <a:srgbClr val="CADCFC"/>
                 </a:solidFill>
@@ -11533,6 +11925,7 @@
           <a:lstStyle/>
           <a:p>
             <a:pPr algn="ctr"/>
+            <a:endParaRPr/>
           </a:p>
         </p:txBody>
       </p:sp>
@@ -11560,48 +11953,13 @@
           <a:p>
             <a:pPr algn="l"/>
             <a:r>
-              <a:rPr sz="1200" b="0" i="0">
+              <a:rPr sz="1200" b="0" i="0" dirty="0">
                 <a:solidFill>
                   <a:srgbClr val="CADCFC"/>
                 </a:solidFill>
                 <a:latin typeface="Calibri"/>
               </a:rPr>
               <a:t>Encryption + key management is stronger than secure deletion alone</a:t>
-            </a:r>
-          </a:p>
-        </p:txBody>
-      </p:sp>
-      <p:sp>
-        <p:nvSpPr>
-          <p:cNvPr id="12" name="TextBox 11"/>
-          <p:cNvSpPr txBox="1"/>
-          <p:nvPr/>
-        </p:nvSpPr>
-        <p:spPr>
-          <a:xfrm>
-            <a:off x="457200" y="6400800"/>
-            <a:ext cx="11247120" cy="320040"/>
-          </a:xfrm>
-          <a:prstGeom prst="rect">
-            <a:avLst/>
-          </a:prstGeom>
-          <a:noFill/>
-        </p:spPr>
-        <p:txBody>
-          <a:bodyPr wrap="square">
-            <a:spAutoFit/>
-          </a:bodyPr>
-          <a:lstStyle/>
-          <a:p>
-            <a:pPr algn="ctr"/>
-            <a:r>
-              <a:rPr sz="1100" b="0" i="1">
-                <a:solidFill>
-                  <a:srgbClr val="8AA8E8"/>
-                </a:solidFill>
-                <a:latin typeface="Calibri"/>
-              </a:rPr>
-              <a:t>CS 419  —  Spring 2026</a:t>
             </a:r>
           </a:p>
         </p:txBody>
